--- a/Salesteq-Raiffeisen-Scenario-Branded.pptx
+++ b/Salesteq-Raiffeisen-Scenario-Branded.pptx
@@ -5225,11 +5225,11 @@
               </a:defRPr>
             </a:pPr>
             <a:r>
-              <a:t>AI kann den Vertrieb stärken —</a:t>
+              <a:t>Gemeinsam herausfinden, was AI</a:t>
             </a:r>
             <a:br/>
             <a:r>
-              <a:t>ohne IT-Projekt, ohne Risiko.</a:t>
+              <a:t>für den Vertrieb bei Raiffeisen bedeutet.</a:t>
             </a:r>
           </a:p>
         </p:txBody>
@@ -5286,7 +5286,7 @@
         <p:spPr>
           <a:xfrm>
             <a:off x="731520" y="1828800"/>
-            <a:ext cx="13167360" cy="822960"/>
+            <a:ext cx="13167360" cy="1097280"/>
           </a:xfrm>
           <a:prstGeom prst="rect">
             <a:avLst/>
@@ -5329,22 +5329,25 @@
         <p:spPr>
           <a:xfrm>
             <a:off x="914400" y="1874519"/>
-            <a:ext cx="12801600" cy="731520"/>
-          </a:xfrm>
-          <a:prstGeom prst="rect">
-            <a:avLst/>
-          </a:prstGeom>
-          <a:noFill/>
-        </p:spPr>
-        <p:txBody>
-          <a:bodyPr wrap="square">
-            <a:spAutoFit/>
-          </a:bodyPr>
-          <a:lstStyle/>
-          <a:p>
-            <a:pPr algn="l">
-              <a:spcAft>
-                <a:spcPts val="0"/>
+            <a:ext cx="12801600" cy="1005840"/>
+          </a:xfrm>
+          <a:prstGeom prst="rect">
+            <a:avLst/>
+          </a:prstGeom>
+          <a:noFill/>
+        </p:spPr>
+        <p:txBody>
+          <a:bodyPr wrap="square">
+            <a:spAutoFit/>
+          </a:bodyPr>
+          <a:lstStyle/>
+          <a:p>
+            <a:pPr algn="l">
+              <a:lnSpc>
+                <a:spcPts val="1620"/>
+              </a:lnSpc>
+              <a:spcAft>
+                <a:spcPts val="200"/>
               </a:spcAft>
               <a:defRPr sz="1200" b="0">
                 <a:solidFill>
@@ -5354,7 +5357,80 @@
               </a:defRPr>
             </a:pPr>
             <a:r>
-              <a:t>Raiffeisen investiert bereits in AI (Meeting-Vorbereitung, Chatbot Tina). Die nächste Welle — proaktive Kundenansprache, Berater-Training, Cross-Selling-Intelligenz — erfordert keine grossen IT-Projekte. Sie erfordert einen Partner mit Produktionserfahrung.</a:t>
+              <a:t>Raiffeisen investiert bereits in AI (Meeting-Vorbereitung, Chatbot Tina). Die Frage ist nicht ob,</a:t>
+            </a:r>
+          </a:p>
+          <a:p>
+            <a:pPr algn="l">
+              <a:lnSpc>
+                <a:spcPts val="1620"/>
+              </a:lnSpc>
+              <a:spcAft>
+                <a:spcPts val="200"/>
+              </a:spcAft>
+              <a:defRPr sz="1200" b="1">
+                <a:solidFill>
+                  <a:srgbClr val="2A2A2A"/>
+                </a:solidFill>
+                <a:latin typeface="Inter"/>
+              </a:defRPr>
+            </a:pPr>
+            <a:r>
+              <a:t>sondern wo und wie AI im Vertrieb den grössten Hebel hat.</a:t>
+            </a:r>
+          </a:p>
+          <a:p>
+            <a:pPr algn="l">
+              <a:lnSpc>
+                <a:spcPts val="810"/>
+              </a:lnSpc>
+              <a:spcAft>
+                <a:spcPts val="200"/>
+              </a:spcAft>
+              <a:defRPr sz="600" b="0">
+                <a:solidFill>
+                  <a:srgbClr val="2A2A2A"/>
+                </a:solidFill>
+                <a:latin typeface="Inter"/>
+              </a:defRPr>
+            </a:pPr>
+          </a:p>
+          <a:p>
+            <a:pPr algn="l">
+              <a:lnSpc>
+                <a:spcPts val="1620"/>
+              </a:lnSpc>
+              <a:spcAft>
+                <a:spcPts val="200"/>
+              </a:spcAft>
+              <a:defRPr sz="1200" b="0">
+                <a:solidFill>
+                  <a:srgbClr val="2A2A2A"/>
+                </a:solidFill>
+                <a:latin typeface="Inter"/>
+              </a:defRPr>
+            </a:pPr>
+            <a:r>
+              <a:t>Wir schlagen vor, das gemeinsam zu erkunden — nicht mit einem fertigen Produktangebot, sondern</a:t>
+            </a:r>
+          </a:p>
+          <a:p>
+            <a:pPr algn="l">
+              <a:lnSpc>
+                <a:spcPts val="1620"/>
+              </a:lnSpc>
+              <a:spcAft>
+                <a:spcPts val="200"/>
+              </a:spcAft>
+              <a:defRPr sz="1200" b="0">
+                <a:solidFill>
+                  <a:srgbClr val="2A2A2A"/>
+                </a:solidFill>
+                <a:latin typeface="Inter"/>
+              </a:defRPr>
+            </a:pPr>
+            <a:r>
+              <a:t>als Sparringspartner mit Produktionserfahrung. So haben wir auch mit Allianz Suisse begonnen.</a:t>
             </a:r>
           </a:p>
         </p:txBody>
@@ -5367,8 +5443,8 @@
         </p:nvSpPr>
         <p:spPr>
           <a:xfrm>
-            <a:off x="731520" y="2834640"/>
-            <a:ext cx="5486400" cy="182880"/>
+            <a:off x="731520" y="3108960"/>
+            <a:ext cx="7315200" cy="182880"/>
           </a:xfrm>
           <a:prstGeom prst="rect">
             <a:avLst/>
@@ -5393,7 +5469,7 @@
               </a:defRPr>
             </a:pPr>
             <a:r>
-              <a:t>VIER SZENARIEN ZUR DISKUSSION</a:t>
+              <a:t>WAS WIR GEMEINSAM ERKUNDEN</a:t>
             </a:r>
           </a:p>
         </p:txBody>
@@ -5406,8 +5482,8 @@
         </p:nvSpPr>
         <p:spPr>
           <a:xfrm>
-            <a:off x="731520" y="3108960"/>
-            <a:ext cx="3154680" cy="2560320"/>
+            <a:off x="731520" y="3383280"/>
+            <a:ext cx="7772400" cy="3291840"/>
           </a:xfrm>
           <a:prstGeom prst="rect">
             <a:avLst/>
@@ -5449,8 +5525,8 @@
         </p:nvSpPr>
         <p:spPr>
           <a:xfrm>
-            <a:off x="731520" y="3108960"/>
-            <a:ext cx="3154680" cy="36576"/>
+            <a:off x="731520" y="3383280"/>
+            <a:ext cx="7772400" cy="36576"/>
           </a:xfrm>
           <a:prstGeom prst="rect">
             <a:avLst/>
@@ -5492,176 +5568,391 @@
         </p:nvSpPr>
         <p:spPr>
           <a:xfrm>
-            <a:off x="914400" y="3246120"/>
-            <a:ext cx="365760" cy="274320"/>
-          </a:xfrm>
-          <a:prstGeom prst="rect">
-            <a:avLst/>
-          </a:prstGeom>
-          <a:noFill/>
-        </p:spPr>
-        <p:txBody>
-          <a:bodyPr wrap="square">
-            <a:spAutoFit/>
-          </a:bodyPr>
-          <a:lstStyle/>
-          <a:p>
-            <a:pPr algn="l">
-              <a:spcAft>
-                <a:spcPts val="0"/>
-              </a:spcAft>
-              <a:defRPr sz="1600" b="1">
+            <a:off x="914400" y="3520440"/>
+            <a:ext cx="7315200" cy="182880"/>
+          </a:xfrm>
+          <a:prstGeom prst="rect">
+            <a:avLst/>
+          </a:prstGeom>
+          <a:noFill/>
+        </p:spPr>
+        <p:txBody>
+          <a:bodyPr wrap="square">
+            <a:spAutoFit/>
+          </a:bodyPr>
+          <a:lstStyle/>
+          <a:p>
+            <a:pPr algn="l">
+              <a:spcAft>
+                <a:spcPts val="0"/>
+              </a:spcAft>
+              <a:defRPr sz="1100" b="1">
+                <a:solidFill>
+                  <a:srgbClr val="131314"/>
+                </a:solidFill>
+                <a:latin typeface="Inter"/>
+              </a:defRPr>
+            </a:pPr>
+            <a:r>
+              <a:t>Vertriebsprozess</a:t>
+            </a:r>
+          </a:p>
+        </p:txBody>
+      </p:sp>
+      <p:sp>
+        <p:nvSpPr>
+          <p:cNvPr id="11" name="TextBox 10"/>
+          <p:cNvSpPr txBox="1"/>
+          <p:nvPr/>
+        </p:nvSpPr>
+        <p:spPr>
+          <a:xfrm>
+            <a:off x="2560320" y="3520440"/>
+            <a:ext cx="5760720" cy="640080"/>
+          </a:xfrm>
+          <a:prstGeom prst="rect">
+            <a:avLst/>
+          </a:prstGeom>
+          <a:noFill/>
+        </p:spPr>
+        <p:txBody>
+          <a:bodyPr wrap="square">
+            <a:spAutoFit/>
+          </a:bodyPr>
+          <a:lstStyle/>
+          <a:p>
+            <a:pPr algn="l">
+              <a:spcAft>
+                <a:spcPts val="0"/>
+              </a:spcAft>
+              <a:defRPr sz="1000" b="0">
+                <a:solidFill>
+                  <a:srgbClr val="6B6B6B"/>
+                </a:solidFill>
+                <a:latin typeface="Inter"/>
+              </a:defRPr>
+            </a:pPr>
+            <a:r>
+              <a:t>Wo im Alltag eines Kundenberaters — von der</a:t>
+            </a:r>
+            <a:br/>
+            <a:r>
+              <a:t>Vorbereitung bis zur Nachbetreuung — kann AI</a:t>
+            </a:r>
+            <a:br/>
+            <a:r>
+              <a:t>die grösste Wirkung entfalten?</a:t>
+            </a:r>
+          </a:p>
+        </p:txBody>
+      </p:sp>
+      <p:sp>
+        <p:nvSpPr>
+          <p:cNvPr id="12" name="TextBox 11"/>
+          <p:cNvSpPr txBox="1"/>
+          <p:nvPr/>
+        </p:nvSpPr>
+        <p:spPr>
+          <a:xfrm>
+            <a:off x="914400" y="4297680"/>
+            <a:ext cx="7315200" cy="182880"/>
+          </a:xfrm>
+          <a:prstGeom prst="rect">
+            <a:avLst/>
+          </a:prstGeom>
+          <a:noFill/>
+        </p:spPr>
+        <p:txBody>
+          <a:bodyPr wrap="square">
+            <a:spAutoFit/>
+          </a:bodyPr>
+          <a:lstStyle/>
+          <a:p>
+            <a:pPr algn="l">
+              <a:spcAft>
+                <a:spcPts val="0"/>
+              </a:spcAft>
+              <a:defRPr sz="1100" b="1">
+                <a:solidFill>
+                  <a:srgbClr val="131314"/>
+                </a:solidFill>
+                <a:latin typeface="Inter"/>
+              </a:defRPr>
+            </a:pPr>
+            <a:r>
+              <a:t>Kundenprozess</a:t>
+            </a:r>
+          </a:p>
+        </p:txBody>
+      </p:sp>
+      <p:sp>
+        <p:nvSpPr>
+          <p:cNvPr id="13" name="TextBox 12"/>
+          <p:cNvSpPr txBox="1"/>
+          <p:nvPr/>
+        </p:nvSpPr>
+        <p:spPr>
+          <a:xfrm>
+            <a:off x="2560320" y="4297680"/>
+            <a:ext cx="5760720" cy="640080"/>
+          </a:xfrm>
+          <a:prstGeom prst="rect">
+            <a:avLst/>
+          </a:prstGeom>
+          <a:noFill/>
+        </p:spPr>
+        <p:txBody>
+          <a:bodyPr wrap="square">
+            <a:spAutoFit/>
+          </a:bodyPr>
+          <a:lstStyle/>
+          <a:p>
+            <a:pPr algn="l">
+              <a:spcAft>
+                <a:spcPts val="0"/>
+              </a:spcAft>
+              <a:defRPr sz="1000" b="0">
+                <a:solidFill>
+                  <a:srgbClr val="6B6B6B"/>
+                </a:solidFill>
+                <a:latin typeface="Inter"/>
+              </a:defRPr>
+            </a:pPr>
+            <a:r>
+              <a:t>An welchen Kontaktpunkten mit dem Kunden —</a:t>
+            </a:r>
+            <a:br/>
+            <a:r>
+              <a:t>Erstanfrage, Beratungsgespräch, Nachfassung —</a:t>
+            </a:r>
+            <a:br/>
+            <a:r>
+              <a:t>gibt es ungenutzte Kapazität?</a:t>
+            </a:r>
+          </a:p>
+        </p:txBody>
+      </p:sp>
+      <p:sp>
+        <p:nvSpPr>
+          <p:cNvPr id="14" name="TextBox 13"/>
+          <p:cNvSpPr txBox="1"/>
+          <p:nvPr/>
+        </p:nvSpPr>
+        <p:spPr>
+          <a:xfrm>
+            <a:off x="914400" y="5074920"/>
+            <a:ext cx="7315200" cy="182880"/>
+          </a:xfrm>
+          <a:prstGeom prst="rect">
+            <a:avLst/>
+          </a:prstGeom>
+          <a:noFill/>
+        </p:spPr>
+        <p:txBody>
+          <a:bodyPr wrap="square">
+            <a:spAutoFit/>
+          </a:bodyPr>
+          <a:lstStyle/>
+          <a:p>
+            <a:pPr algn="l">
+              <a:spcAft>
+                <a:spcPts val="0"/>
+              </a:spcAft>
+              <a:defRPr sz="1100" b="1">
+                <a:solidFill>
+                  <a:srgbClr val="131314"/>
+                </a:solidFill>
+                <a:latin typeface="Inter"/>
+              </a:defRPr>
+            </a:pPr>
+            <a:r>
+              <a:t>Skalierung</a:t>
+            </a:r>
+          </a:p>
+        </p:txBody>
+      </p:sp>
+      <p:sp>
+        <p:nvSpPr>
+          <p:cNvPr id="15" name="TextBox 14"/>
+          <p:cNvSpPr txBox="1"/>
+          <p:nvPr/>
+        </p:nvSpPr>
+        <p:spPr>
+          <a:xfrm>
+            <a:off x="2560320" y="5074920"/>
+            <a:ext cx="5760720" cy="640080"/>
+          </a:xfrm>
+          <a:prstGeom prst="rect">
+            <a:avLst/>
+          </a:prstGeom>
+          <a:noFill/>
+        </p:spPr>
+        <p:txBody>
+          <a:bodyPr wrap="square">
+            <a:spAutoFit/>
+          </a:bodyPr>
+          <a:lstStyle/>
+          <a:p>
+            <a:pPr algn="l">
+              <a:spcAft>
+                <a:spcPts val="0"/>
+              </a:spcAft>
+              <a:defRPr sz="1000" b="0">
+                <a:solidFill>
+                  <a:srgbClr val="6B6B6B"/>
+                </a:solidFill>
+                <a:latin typeface="Inter"/>
+              </a:defRPr>
+            </a:pPr>
+            <a:r>
+              <a:t>Was funktioniert in einer Filiale und lässt sich</a:t>
+            </a:r>
+            <a:br/>
+            <a:r>
+              <a:t>auf 212 Genossenschaftsbanken übertragen?</a:t>
+            </a:r>
+            <a:br/>
+            <a:r>
+              <a:t>Was ist spezifisch, was ist universell?</a:t>
+            </a:r>
+          </a:p>
+        </p:txBody>
+      </p:sp>
+      <p:sp>
+        <p:nvSpPr>
+          <p:cNvPr id="16" name="TextBox 15"/>
+          <p:cNvSpPr txBox="1"/>
+          <p:nvPr/>
+        </p:nvSpPr>
+        <p:spPr>
+          <a:xfrm>
+            <a:off x="914400" y="5852160"/>
+            <a:ext cx="7315200" cy="182880"/>
+          </a:xfrm>
+          <a:prstGeom prst="rect">
+            <a:avLst/>
+          </a:prstGeom>
+          <a:noFill/>
+        </p:spPr>
+        <p:txBody>
+          <a:bodyPr wrap="square">
+            <a:spAutoFit/>
+          </a:bodyPr>
+          <a:lstStyle/>
+          <a:p>
+            <a:pPr algn="l">
+              <a:spcAft>
+                <a:spcPts val="0"/>
+              </a:spcAft>
+              <a:defRPr sz="1100" b="1">
+                <a:solidFill>
+                  <a:srgbClr val="131314"/>
+                </a:solidFill>
+                <a:latin typeface="Inter"/>
+              </a:defRPr>
+            </a:pPr>
+            <a:r>
+              <a:t>Organisation</a:t>
+            </a:r>
+          </a:p>
+        </p:txBody>
+      </p:sp>
+      <p:sp>
+        <p:nvSpPr>
+          <p:cNvPr id="17" name="TextBox 16"/>
+          <p:cNvSpPr txBox="1"/>
+          <p:nvPr/>
+        </p:nvSpPr>
+        <p:spPr>
+          <a:xfrm>
+            <a:off x="2560320" y="5852160"/>
+            <a:ext cx="5760720" cy="640080"/>
+          </a:xfrm>
+          <a:prstGeom prst="rect">
+            <a:avLst/>
+          </a:prstGeom>
+          <a:noFill/>
+        </p:spPr>
+        <p:txBody>
+          <a:bodyPr wrap="square">
+            <a:spAutoFit/>
+          </a:bodyPr>
+          <a:lstStyle/>
+          <a:p>
+            <a:pPr algn="l">
+              <a:spcAft>
+                <a:spcPts val="0"/>
+              </a:spcAft>
+              <a:defRPr sz="1000" b="0">
+                <a:solidFill>
+                  <a:srgbClr val="6B6B6B"/>
+                </a:solidFill>
+                <a:latin typeface="Inter"/>
+              </a:defRPr>
+            </a:pPr>
+            <a:r>
+              <a:t>Wie passt AI in die bestehende Vertriebssteuerung?</a:t>
+            </a:r>
+            <a:br/>
+            <a:r>
+              <a:t>Wo unterstützt es den RM, wo die Filialleitung,</a:t>
+            </a:r>
+            <a:br/>
+            <a:r>
+              <a:t>wo die zentrale Vertriebsführung?</a:t>
+            </a:r>
+          </a:p>
+        </p:txBody>
+      </p:sp>
+      <p:sp>
+        <p:nvSpPr>
+          <p:cNvPr id="18" name="TextBox 17"/>
+          <p:cNvSpPr txBox="1"/>
+          <p:nvPr/>
+        </p:nvSpPr>
+        <p:spPr>
+          <a:xfrm>
+            <a:off x="9144000" y="3108960"/>
+            <a:ext cx="4572000" cy="182880"/>
+          </a:xfrm>
+          <a:prstGeom prst="rect">
+            <a:avLst/>
+          </a:prstGeom>
+          <a:noFill/>
+        </p:spPr>
+        <p:txBody>
+          <a:bodyPr wrap="square">
+            <a:spAutoFit/>
+          </a:bodyPr>
+          <a:lstStyle/>
+          <a:p>
+            <a:pPr algn="l">
+              <a:spcAft>
+                <a:spcPts val="0"/>
+              </a:spcAft>
+              <a:defRPr sz="900" b="1">
                 <a:solidFill>
                   <a:srgbClr val="D97757"/>
                 </a:solidFill>
-                <a:latin typeface="Inter"/>
-              </a:defRPr>
-            </a:pPr>
-            <a:r>
-              <a:t>A</a:t>
-            </a:r>
-          </a:p>
-        </p:txBody>
-      </p:sp>
-      <p:sp>
-        <p:nvSpPr>
-          <p:cNvPr id="11" name="TextBox 10"/>
-          <p:cNvSpPr txBox="1"/>
-          <p:nvPr/>
-        </p:nvSpPr>
-        <p:spPr>
-          <a:xfrm>
-            <a:off x="1280160" y="3273552"/>
-            <a:ext cx="2377440" cy="274320"/>
-          </a:xfrm>
-          <a:prstGeom prst="rect">
-            <a:avLst/>
-          </a:prstGeom>
-          <a:noFill/>
-        </p:spPr>
-        <p:txBody>
-          <a:bodyPr wrap="square">
-            <a:spAutoFit/>
-          </a:bodyPr>
-          <a:lstStyle/>
-          <a:p>
-            <a:pPr algn="l">
-              <a:spcAft>
-                <a:spcPts val="0"/>
-              </a:spcAft>
-              <a:defRPr sz="1100" b="1">
-                <a:solidFill>
-                  <a:srgbClr val="131314"/>
-                </a:solidFill>
-                <a:latin typeface="Inter"/>
-              </a:defRPr>
-            </a:pPr>
-            <a:r>
-              <a:t>Training &amp; Onboarding</a:t>
-            </a:r>
-          </a:p>
-        </p:txBody>
-      </p:sp>
-      <p:sp>
-        <p:nvSpPr>
-          <p:cNvPr id="12" name="Rectangle 11"/>
+                <a:latin typeface="JetBrains Mono"/>
+              </a:defRPr>
+            </a:pPr>
+            <a:r>
+              <a:t>IDEENBACKLOG (BEISPIELE)</a:t>
+            </a:r>
+          </a:p>
+        </p:txBody>
+      </p:sp>
+      <p:sp>
+        <p:nvSpPr>
+          <p:cNvPr id="19" name="Rectangle 18"/>
           <p:cNvSpPr/>
           <p:nvPr/>
         </p:nvSpPr>
         <p:spPr>
           <a:xfrm>
-            <a:off x="914400" y="3611880"/>
-            <a:ext cx="2788920" cy="12700"/>
-          </a:xfrm>
-          <a:prstGeom prst="rect">
-            <a:avLst/>
-          </a:prstGeom>
-          <a:solidFill>
-            <a:srgbClr val="E8E7DD"/>
-          </a:solidFill>
-          <a:ln>
-            <a:noFill/>
-          </a:ln>
-        </p:spPr>
-        <p:style>
-          <a:lnRef idx="1">
-            <a:schemeClr val="accent1"/>
-          </a:lnRef>
-          <a:fillRef idx="3">
-            <a:schemeClr val="accent1"/>
-          </a:fillRef>
-          <a:effectRef idx="2">
-            <a:schemeClr val="accent1"/>
-          </a:effectRef>
-          <a:fontRef idx="minor">
-            <a:schemeClr val="lt1"/>
-          </a:fontRef>
-        </p:style>
-        <p:txBody>
-          <a:bodyPr rtlCol="0" anchor="ctr"/>
-          <a:lstStyle/>
-          <a:p>
-            <a:pPr algn="ctr"/>
-          </a:p>
-        </p:txBody>
-      </p:sp>
-      <p:sp>
-        <p:nvSpPr>
-          <p:cNvPr id="13" name="TextBox 12"/>
-          <p:cNvSpPr txBox="1"/>
-          <p:nvPr/>
-        </p:nvSpPr>
-        <p:spPr>
-          <a:xfrm>
-            <a:off x="914400" y="3703320"/>
-            <a:ext cx="2743200" cy="1645920"/>
-          </a:xfrm>
-          <a:prstGeom prst="rect">
-            <a:avLst/>
-          </a:prstGeom>
-          <a:noFill/>
-        </p:spPr>
-        <p:txBody>
-          <a:bodyPr wrap="square">
-            <a:spAutoFit/>
-          </a:bodyPr>
-          <a:lstStyle/>
-          <a:p>
-            <a:pPr algn="l">
-              <a:spcAft>
-                <a:spcPts val="0"/>
-              </a:spcAft>
-              <a:defRPr sz="1000" b="0">
-                <a:solidFill>
-                  <a:srgbClr val="6B6B6B"/>
-                </a:solidFill>
-                <a:latin typeface="Inter"/>
-              </a:defRPr>
-            </a:pPr>
-            <a:r>
-              <a:t>Neue Berater schneller produktiv machen.</a:t>
-            </a:r>
-            <a:br/>
-            <a:r>
-              <a:t>AI als Sparringspartner für Produkt-</a:t>
-            </a:r>
-            <a:br/>
-            <a:r>
-              <a:t>und Beratungswissen. SAQ-Vorbereitung.</a:t>
-            </a:r>
-          </a:p>
-        </p:txBody>
-      </p:sp>
-      <p:sp>
-        <p:nvSpPr>
-          <p:cNvPr id="14" name="Rectangle 13"/>
-          <p:cNvSpPr/>
-          <p:nvPr/>
-        </p:nvSpPr>
-        <p:spPr>
-          <a:xfrm>
-            <a:off x="4069080" y="3108960"/>
-            <a:ext cx="3154680" cy="2560320"/>
+            <a:off x="9144000" y="3383280"/>
+            <a:ext cx="4754880" cy="3291840"/>
           </a:xfrm>
           <a:prstGeom prst="rect">
             <a:avLst/>
@@ -5697,14 +5988,14 @@
       </p:sp>
       <p:sp>
         <p:nvSpPr>
-          <p:cNvPr id="15" name="Rectangle 14"/>
+          <p:cNvPr id="20" name="Rectangle 19"/>
           <p:cNvSpPr/>
           <p:nvPr/>
         </p:nvSpPr>
         <p:spPr>
           <a:xfrm>
-            <a:off x="4069080" y="3108960"/>
-            <a:ext cx="3154680" cy="36576"/>
+            <a:off x="9144000" y="3383280"/>
+            <a:ext cx="4754880" cy="36576"/>
           </a:xfrm>
           <a:prstGeom prst="rect">
             <a:avLst/>
@@ -5740,70 +6031,31 @@
       </p:sp>
       <p:sp>
         <p:nvSpPr>
-          <p:cNvPr id="16" name="TextBox 15"/>
-          <p:cNvSpPr txBox="1"/>
-          <p:nvPr/>
-        </p:nvSpPr>
-        <p:spPr>
-          <a:xfrm>
-            <a:off x="4251960" y="3246120"/>
-            <a:ext cx="365760" cy="274320"/>
-          </a:xfrm>
-          <a:prstGeom prst="rect">
-            <a:avLst/>
-          </a:prstGeom>
-          <a:noFill/>
-        </p:spPr>
-        <p:txBody>
-          <a:bodyPr wrap="square">
-            <a:spAutoFit/>
-          </a:bodyPr>
-          <a:lstStyle/>
-          <a:p>
-            <a:pPr algn="l">
-              <a:spcAft>
-                <a:spcPts val="0"/>
-              </a:spcAft>
-              <a:defRPr sz="1600" b="1">
-                <a:solidFill>
-                  <a:srgbClr val="D97757"/>
-                </a:solidFill>
-                <a:latin typeface="Inter"/>
-              </a:defRPr>
-            </a:pPr>
-            <a:r>
-              <a:t>B</a:t>
-            </a:r>
-          </a:p>
-        </p:txBody>
-      </p:sp>
-      <p:sp>
-        <p:nvSpPr>
-          <p:cNvPr id="17" name="TextBox 16"/>
-          <p:cNvSpPr txBox="1"/>
-          <p:nvPr/>
-        </p:nvSpPr>
-        <p:spPr>
-          <a:xfrm>
-            <a:off x="4617720" y="3273552"/>
-            <a:ext cx="2377440" cy="274320"/>
-          </a:xfrm>
-          <a:prstGeom prst="rect">
-            <a:avLst/>
-          </a:prstGeom>
-          <a:noFill/>
-        </p:spPr>
-        <p:txBody>
-          <a:bodyPr wrap="square">
-            <a:spAutoFit/>
-          </a:bodyPr>
-          <a:lstStyle/>
-          <a:p>
-            <a:pPr algn="l">
-              <a:spcAft>
-                <a:spcPts val="0"/>
-              </a:spcAft>
-              <a:defRPr sz="1100" b="1">
+          <p:cNvPr id="21" name="TextBox 20"/>
+          <p:cNvSpPr txBox="1"/>
+          <p:nvPr/>
+        </p:nvSpPr>
+        <p:spPr>
+          <a:xfrm>
+            <a:off x="9326880" y="3520440"/>
+            <a:ext cx="2286000" cy="274320"/>
+          </a:xfrm>
+          <a:prstGeom prst="rect">
+            <a:avLst/>
+          </a:prstGeom>
+          <a:noFill/>
+        </p:spPr>
+        <p:txBody>
+          <a:bodyPr wrap="square">
+            <a:spAutoFit/>
+          </a:bodyPr>
+          <a:lstStyle/>
+          <a:p>
+            <a:pPr algn="l">
+              <a:spcAft>
+                <a:spcPts val="0"/>
+              </a:spcAft>
+              <a:defRPr sz="900" b="1">
                 <a:solidFill>
                   <a:srgbClr val="131314"/>
                 </a:solidFill>
@@ -5811,111 +6063,606 @@
               </a:defRPr>
             </a:pPr>
             <a:r>
-              <a:t>Proaktive Kundenansprache</a:t>
-            </a:r>
-          </a:p>
-        </p:txBody>
-      </p:sp>
-      <p:sp>
-        <p:nvSpPr>
-          <p:cNvPr id="18" name="Rectangle 17"/>
+              <a:t>RM-Training &amp; Onboarding</a:t>
+            </a:r>
+          </a:p>
+        </p:txBody>
+      </p:sp>
+      <p:sp>
+        <p:nvSpPr>
+          <p:cNvPr id="22" name="TextBox 21"/>
+          <p:cNvSpPr txBox="1"/>
+          <p:nvPr/>
+        </p:nvSpPr>
+        <p:spPr>
+          <a:xfrm>
+            <a:off x="11704320" y="3520440"/>
+            <a:ext cx="2011680" cy="274320"/>
+          </a:xfrm>
+          <a:prstGeom prst="rect">
+            <a:avLst/>
+          </a:prstGeom>
+          <a:noFill/>
+        </p:spPr>
+        <p:txBody>
+          <a:bodyPr wrap="square">
+            <a:spAutoFit/>
+          </a:bodyPr>
+          <a:lstStyle/>
+          <a:p>
+            <a:pPr algn="l">
+              <a:spcAft>
+                <a:spcPts val="0"/>
+              </a:spcAft>
+              <a:defRPr sz="850" b="0">
+                <a:solidFill>
+                  <a:srgbClr val="6B6B6B"/>
+                </a:solidFill>
+                <a:latin typeface="Inter"/>
+              </a:defRPr>
+            </a:pPr>
+            <a:r>
+              <a:t>Sparringspartner für neue Berater</a:t>
+            </a:r>
+          </a:p>
+        </p:txBody>
+      </p:sp>
+      <p:sp>
+        <p:nvSpPr>
+          <p:cNvPr id="23" name="TextBox 22"/>
+          <p:cNvSpPr txBox="1"/>
+          <p:nvPr/>
+        </p:nvSpPr>
+        <p:spPr>
+          <a:xfrm>
+            <a:off x="9326880" y="3904488"/>
+            <a:ext cx="2286000" cy="274320"/>
+          </a:xfrm>
+          <a:prstGeom prst="rect">
+            <a:avLst/>
+          </a:prstGeom>
+          <a:noFill/>
+        </p:spPr>
+        <p:txBody>
+          <a:bodyPr wrap="square">
+            <a:spAutoFit/>
+          </a:bodyPr>
+          <a:lstStyle/>
+          <a:p>
+            <a:pPr algn="l">
+              <a:spcAft>
+                <a:spcPts val="0"/>
+              </a:spcAft>
+              <a:defRPr sz="900" b="1">
+                <a:solidFill>
+                  <a:srgbClr val="131314"/>
+                </a:solidFill>
+                <a:latin typeface="Inter"/>
+              </a:defRPr>
+            </a:pPr>
+            <a:r>
+              <a:t>Produktwissen on-demand</a:t>
+            </a:r>
+          </a:p>
+        </p:txBody>
+      </p:sp>
+      <p:sp>
+        <p:nvSpPr>
+          <p:cNvPr id="24" name="TextBox 23"/>
+          <p:cNvSpPr txBox="1"/>
+          <p:nvPr/>
+        </p:nvSpPr>
+        <p:spPr>
+          <a:xfrm>
+            <a:off x="11704320" y="3904488"/>
+            <a:ext cx="2011680" cy="274320"/>
+          </a:xfrm>
+          <a:prstGeom prst="rect">
+            <a:avLst/>
+          </a:prstGeom>
+          <a:noFill/>
+        </p:spPr>
+        <p:txBody>
+          <a:bodyPr wrap="square">
+            <a:spAutoFit/>
+          </a:bodyPr>
+          <a:lstStyle/>
+          <a:p>
+            <a:pPr algn="l">
+              <a:spcAft>
+                <a:spcPts val="0"/>
+              </a:spcAft>
+              <a:defRPr sz="850" b="0">
+                <a:solidFill>
+                  <a:srgbClr val="6B6B6B"/>
+                </a:solidFill>
+                <a:latin typeface="Inter"/>
+              </a:defRPr>
+            </a:pPr>
+            <a:r>
+              <a:t>Einheitliche Wissensbasis, 212 Banken</a:t>
+            </a:r>
+          </a:p>
+        </p:txBody>
+      </p:sp>
+      <p:sp>
+        <p:nvSpPr>
+          <p:cNvPr id="25" name="TextBox 24"/>
+          <p:cNvSpPr txBox="1"/>
+          <p:nvPr/>
+        </p:nvSpPr>
+        <p:spPr>
+          <a:xfrm>
+            <a:off x="9326880" y="4288536"/>
+            <a:ext cx="2286000" cy="274320"/>
+          </a:xfrm>
+          <a:prstGeom prst="rect">
+            <a:avLst/>
+          </a:prstGeom>
+          <a:noFill/>
+        </p:spPr>
+        <p:txBody>
+          <a:bodyPr wrap="square">
+            <a:spAutoFit/>
+          </a:bodyPr>
+          <a:lstStyle/>
+          <a:p>
+            <a:pPr algn="l">
+              <a:spcAft>
+                <a:spcPts val="0"/>
+              </a:spcAft>
+              <a:defRPr sz="900" b="1">
+                <a:solidFill>
+                  <a:srgbClr val="131314"/>
+                </a:solidFill>
+                <a:latin typeface="Inter"/>
+              </a:defRPr>
+            </a:pPr>
+            <a:r>
+              <a:t>Erster Kundenkontakt</a:t>
+            </a:r>
+          </a:p>
+        </p:txBody>
+      </p:sp>
+      <p:sp>
+        <p:nvSpPr>
+          <p:cNvPr id="26" name="TextBox 25"/>
+          <p:cNvSpPr txBox="1"/>
+          <p:nvPr/>
+        </p:nvSpPr>
+        <p:spPr>
+          <a:xfrm>
+            <a:off x="11704320" y="4288536"/>
+            <a:ext cx="2011680" cy="274320"/>
+          </a:xfrm>
+          <a:prstGeom prst="rect">
+            <a:avLst/>
+          </a:prstGeom>
+          <a:noFill/>
+        </p:spPr>
+        <p:txBody>
+          <a:bodyPr wrap="square">
+            <a:spAutoFit/>
+          </a:bodyPr>
+          <a:lstStyle/>
+          <a:p>
+            <a:pPr algn="l">
+              <a:spcAft>
+                <a:spcPts val="0"/>
+              </a:spcAft>
+              <a:defRPr sz="850" b="0">
+                <a:solidFill>
+                  <a:srgbClr val="6B6B6B"/>
+                </a:solidFill>
+                <a:latin typeface="Inter"/>
+              </a:defRPr>
+            </a:pPr>
+            <a:r>
+              <a:t>Chat und Telefon in DE/FR/IT</a:t>
+            </a:r>
+          </a:p>
+        </p:txBody>
+      </p:sp>
+      <p:sp>
+        <p:nvSpPr>
+          <p:cNvPr id="27" name="TextBox 26"/>
+          <p:cNvSpPr txBox="1"/>
+          <p:nvPr/>
+        </p:nvSpPr>
+        <p:spPr>
+          <a:xfrm>
+            <a:off x="9326880" y="4672584"/>
+            <a:ext cx="2286000" cy="274320"/>
+          </a:xfrm>
+          <a:prstGeom prst="rect">
+            <a:avLst/>
+          </a:prstGeom>
+          <a:noFill/>
+        </p:spPr>
+        <p:txBody>
+          <a:bodyPr wrap="square">
+            <a:spAutoFit/>
+          </a:bodyPr>
+          <a:lstStyle/>
+          <a:p>
+            <a:pPr algn="l">
+              <a:spcAft>
+                <a:spcPts val="0"/>
+              </a:spcAft>
+              <a:defRPr sz="900" b="1">
+                <a:solidFill>
+                  <a:srgbClr val="131314"/>
+                </a:solidFill>
+                <a:latin typeface="Inter"/>
+              </a:defRPr>
+            </a:pPr>
+            <a:r>
+              <a:t>Beratungsvor- und -nachbereitung</a:t>
+            </a:r>
+          </a:p>
+        </p:txBody>
+      </p:sp>
+      <p:sp>
+        <p:nvSpPr>
+          <p:cNvPr id="28" name="TextBox 27"/>
+          <p:cNvSpPr txBox="1"/>
+          <p:nvPr/>
+        </p:nvSpPr>
+        <p:spPr>
+          <a:xfrm>
+            <a:off x="11704320" y="4672584"/>
+            <a:ext cx="2011680" cy="274320"/>
+          </a:xfrm>
+          <a:prstGeom prst="rect">
+            <a:avLst/>
+          </a:prstGeom>
+          <a:noFill/>
+        </p:spPr>
+        <p:txBody>
+          <a:bodyPr wrap="square">
+            <a:spAutoFit/>
+          </a:bodyPr>
+          <a:lstStyle/>
+          <a:p>
+            <a:pPr algn="l">
+              <a:spcAft>
+                <a:spcPts val="0"/>
+              </a:spcAft>
+              <a:defRPr sz="850" b="0">
+                <a:solidFill>
+                  <a:srgbClr val="6B6B6B"/>
+                </a:solidFill>
+                <a:latin typeface="Inter"/>
+              </a:defRPr>
+            </a:pPr>
+            <a:r>
+              <a:t>Briefings, Follow-ups, Dokumentation</a:t>
+            </a:r>
+          </a:p>
+        </p:txBody>
+      </p:sp>
+      <p:sp>
+        <p:nvSpPr>
+          <p:cNvPr id="29" name="TextBox 28"/>
+          <p:cNvSpPr txBox="1"/>
+          <p:nvPr/>
+        </p:nvSpPr>
+        <p:spPr>
+          <a:xfrm>
+            <a:off x="9326880" y="5056632"/>
+            <a:ext cx="2286000" cy="274320"/>
+          </a:xfrm>
+          <a:prstGeom prst="rect">
+            <a:avLst/>
+          </a:prstGeom>
+          <a:noFill/>
+        </p:spPr>
+        <p:txBody>
+          <a:bodyPr wrap="square">
+            <a:spAutoFit/>
+          </a:bodyPr>
+          <a:lstStyle/>
+          <a:p>
+            <a:pPr algn="l">
+              <a:spcAft>
+                <a:spcPts val="0"/>
+              </a:spcAft>
+              <a:defRPr sz="900" b="1">
+                <a:solidFill>
+                  <a:srgbClr val="131314"/>
+                </a:solidFill>
+                <a:latin typeface="Inter"/>
+              </a:defRPr>
+            </a:pPr>
+            <a:r>
+              <a:t>Cross-Selling-Signale</a:t>
+            </a:r>
+          </a:p>
+        </p:txBody>
+      </p:sp>
+      <p:sp>
+        <p:nvSpPr>
+          <p:cNvPr id="30" name="TextBox 29"/>
+          <p:cNvSpPr txBox="1"/>
+          <p:nvPr/>
+        </p:nvSpPr>
+        <p:spPr>
+          <a:xfrm>
+            <a:off x="11704320" y="5056632"/>
+            <a:ext cx="2011680" cy="274320"/>
+          </a:xfrm>
+          <a:prstGeom prst="rect">
+            <a:avLst/>
+          </a:prstGeom>
+          <a:noFill/>
+        </p:spPr>
+        <p:txBody>
+          <a:bodyPr wrap="square">
+            <a:spAutoFit/>
+          </a:bodyPr>
+          <a:lstStyle/>
+          <a:p>
+            <a:pPr algn="l">
+              <a:spcAft>
+                <a:spcPts val="0"/>
+              </a:spcAft>
+              <a:defRPr sz="850" b="0">
+                <a:solidFill>
+                  <a:srgbClr val="6B6B6B"/>
+                </a:solidFill>
+                <a:latin typeface="Inter"/>
+              </a:defRPr>
+            </a:pPr>
+            <a:r>
+              <a:t>Portfolio-Lücken erkennen und priorisieren</a:t>
+            </a:r>
+          </a:p>
+        </p:txBody>
+      </p:sp>
+      <p:sp>
+        <p:nvSpPr>
+          <p:cNvPr id="31" name="TextBox 30"/>
+          <p:cNvSpPr txBox="1"/>
+          <p:nvPr/>
+        </p:nvSpPr>
+        <p:spPr>
+          <a:xfrm>
+            <a:off x="9326880" y="5440680"/>
+            <a:ext cx="2286000" cy="274320"/>
+          </a:xfrm>
+          <a:prstGeom prst="rect">
+            <a:avLst/>
+          </a:prstGeom>
+          <a:noFill/>
+        </p:spPr>
+        <p:txBody>
+          <a:bodyPr wrap="square">
+            <a:spAutoFit/>
+          </a:bodyPr>
+          <a:lstStyle/>
+          <a:p>
+            <a:pPr algn="l">
+              <a:spcAft>
+                <a:spcPts val="0"/>
+              </a:spcAft>
+              <a:defRPr sz="900" b="1">
+                <a:solidFill>
+                  <a:srgbClr val="131314"/>
+                </a:solidFill>
+                <a:latin typeface="Inter"/>
+              </a:defRPr>
+            </a:pPr>
+            <a:r>
+              <a:t>Proaktive Kontaktanlässe</a:t>
+            </a:r>
+          </a:p>
+        </p:txBody>
+      </p:sp>
+      <p:sp>
+        <p:nvSpPr>
+          <p:cNvPr id="32" name="TextBox 31"/>
+          <p:cNvSpPr txBox="1"/>
+          <p:nvPr/>
+        </p:nvSpPr>
+        <p:spPr>
+          <a:xfrm>
+            <a:off x="11704320" y="5440680"/>
+            <a:ext cx="2011680" cy="274320"/>
+          </a:xfrm>
+          <a:prstGeom prst="rect">
+            <a:avLst/>
+          </a:prstGeom>
+          <a:noFill/>
+        </p:spPr>
+        <p:txBody>
+          <a:bodyPr wrap="square">
+            <a:spAutoFit/>
+          </a:bodyPr>
+          <a:lstStyle/>
+          <a:p>
+            <a:pPr algn="l">
+              <a:spcAft>
+                <a:spcPts val="0"/>
+              </a:spcAft>
+              <a:defRPr sz="850" b="0">
+                <a:solidFill>
+                  <a:srgbClr val="6B6B6B"/>
+                </a:solidFill>
+                <a:latin typeface="Inter"/>
+              </a:defRPr>
+            </a:pPr>
+            <a:r>
+              <a:t>Trigger bei Lebensereignissen, Zinsänderungen</a:t>
+            </a:r>
+          </a:p>
+        </p:txBody>
+      </p:sp>
+      <p:sp>
+        <p:nvSpPr>
+          <p:cNvPr id="33" name="TextBox 32"/>
+          <p:cNvSpPr txBox="1"/>
+          <p:nvPr/>
+        </p:nvSpPr>
+        <p:spPr>
+          <a:xfrm>
+            <a:off x="9326880" y="5824728"/>
+            <a:ext cx="2286000" cy="274320"/>
+          </a:xfrm>
+          <a:prstGeom prst="rect">
+            <a:avLst/>
+          </a:prstGeom>
+          <a:noFill/>
+        </p:spPr>
+        <p:txBody>
+          <a:bodyPr wrap="square">
+            <a:spAutoFit/>
+          </a:bodyPr>
+          <a:lstStyle/>
+          <a:p>
+            <a:pPr algn="l">
+              <a:spcAft>
+                <a:spcPts val="0"/>
+              </a:spcAft>
+              <a:defRPr sz="900" b="1">
+                <a:solidFill>
+                  <a:srgbClr val="131314"/>
+                </a:solidFill>
+                <a:latin typeface="Inter"/>
+              </a:defRPr>
+            </a:pPr>
+            <a:r>
+              <a:t>Kampagnen-Unterstützung</a:t>
+            </a:r>
+          </a:p>
+        </p:txBody>
+      </p:sp>
+      <p:sp>
+        <p:nvSpPr>
+          <p:cNvPr id="34" name="TextBox 33"/>
+          <p:cNvSpPr txBox="1"/>
+          <p:nvPr/>
+        </p:nvSpPr>
+        <p:spPr>
+          <a:xfrm>
+            <a:off x="11704320" y="5824728"/>
+            <a:ext cx="2011680" cy="274320"/>
+          </a:xfrm>
+          <a:prstGeom prst="rect">
+            <a:avLst/>
+          </a:prstGeom>
+          <a:noFill/>
+        </p:spPr>
+        <p:txBody>
+          <a:bodyPr wrap="square">
+            <a:spAutoFit/>
+          </a:bodyPr>
+          <a:lstStyle/>
+          <a:p>
+            <a:pPr algn="l">
+              <a:spcAft>
+                <a:spcPts val="0"/>
+              </a:spcAft>
+              <a:defRPr sz="850" b="0">
+                <a:solidFill>
+                  <a:srgbClr val="6B6B6B"/>
+                </a:solidFill>
+                <a:latin typeface="Inter"/>
+              </a:defRPr>
+            </a:pPr>
+            <a:r>
+              <a:t>Personalisierte Ansprache in drei Sprachen</a:t>
+            </a:r>
+          </a:p>
+        </p:txBody>
+      </p:sp>
+      <p:sp>
+        <p:nvSpPr>
+          <p:cNvPr id="35" name="TextBox 34"/>
+          <p:cNvSpPr txBox="1"/>
+          <p:nvPr/>
+        </p:nvSpPr>
+        <p:spPr>
+          <a:xfrm>
+            <a:off x="9326880" y="6208776"/>
+            <a:ext cx="2286000" cy="274320"/>
+          </a:xfrm>
+          <a:prstGeom prst="rect">
+            <a:avLst/>
+          </a:prstGeom>
+          <a:noFill/>
+        </p:spPr>
+        <p:txBody>
+          <a:bodyPr wrap="square">
+            <a:spAutoFit/>
+          </a:bodyPr>
+          <a:lstStyle/>
+          <a:p>
+            <a:pPr algn="l">
+              <a:spcAft>
+                <a:spcPts val="0"/>
+              </a:spcAft>
+              <a:defRPr sz="900" b="1">
+                <a:solidFill>
+                  <a:srgbClr val="131314"/>
+                </a:solidFill>
+                <a:latin typeface="Inter"/>
+              </a:defRPr>
+            </a:pPr>
+            <a:r>
+              <a:t>Wissenstransfer</a:t>
+            </a:r>
+          </a:p>
+        </p:txBody>
+      </p:sp>
+      <p:sp>
+        <p:nvSpPr>
+          <p:cNvPr id="36" name="TextBox 35"/>
+          <p:cNvSpPr txBox="1"/>
+          <p:nvPr/>
+        </p:nvSpPr>
+        <p:spPr>
+          <a:xfrm>
+            <a:off x="11704320" y="6208776"/>
+            <a:ext cx="2011680" cy="274320"/>
+          </a:xfrm>
+          <a:prstGeom prst="rect">
+            <a:avLst/>
+          </a:prstGeom>
+          <a:noFill/>
+        </p:spPr>
+        <p:txBody>
+          <a:bodyPr wrap="square">
+            <a:spAutoFit/>
+          </a:bodyPr>
+          <a:lstStyle/>
+          <a:p>
+            <a:pPr algn="l">
+              <a:spcAft>
+                <a:spcPts val="0"/>
+              </a:spcAft>
+              <a:defRPr sz="850" b="0">
+                <a:solidFill>
+                  <a:srgbClr val="6B6B6B"/>
+                </a:solidFill>
+                <a:latin typeface="Inter"/>
+              </a:defRPr>
+            </a:pPr>
+            <a:r>
+              <a:t>Best Practices zwischen Filialen teilen</a:t>
+            </a:r>
+          </a:p>
+        </p:txBody>
+      </p:sp>
+      <p:sp>
+        <p:nvSpPr>
+          <p:cNvPr id="37" name="Rectangle 36"/>
           <p:cNvSpPr/>
           <p:nvPr/>
         </p:nvSpPr>
         <p:spPr>
           <a:xfrm>
-            <a:off x="4251960" y="3611880"/>
-            <a:ext cx="2788920" cy="12700"/>
-          </a:xfrm>
-          <a:prstGeom prst="rect">
-            <a:avLst/>
-          </a:prstGeom>
-          <a:solidFill>
-            <a:srgbClr val="E8E7DD"/>
-          </a:solidFill>
-          <a:ln>
-            <a:noFill/>
-          </a:ln>
-        </p:spPr>
-        <p:style>
-          <a:lnRef idx="1">
-            <a:schemeClr val="accent1"/>
-          </a:lnRef>
-          <a:fillRef idx="3">
-            <a:schemeClr val="accent1"/>
-          </a:fillRef>
-          <a:effectRef idx="2">
-            <a:schemeClr val="accent1"/>
-          </a:effectRef>
-          <a:fontRef idx="minor">
-            <a:schemeClr val="lt1"/>
-          </a:fontRef>
-        </p:style>
-        <p:txBody>
-          <a:bodyPr rtlCol="0" anchor="ctr"/>
-          <a:lstStyle/>
-          <a:p>
-            <a:pPr algn="ctr"/>
-          </a:p>
-        </p:txBody>
-      </p:sp>
-      <p:sp>
-        <p:nvSpPr>
-          <p:cNvPr id="19" name="TextBox 18"/>
-          <p:cNvSpPr txBox="1"/>
-          <p:nvPr/>
-        </p:nvSpPr>
-        <p:spPr>
-          <a:xfrm>
-            <a:off x="4251960" y="3703320"/>
-            <a:ext cx="2743200" cy="1645920"/>
-          </a:xfrm>
-          <a:prstGeom prst="rect">
-            <a:avLst/>
-          </a:prstGeom>
-          <a:noFill/>
-        </p:spPr>
-        <p:txBody>
-          <a:bodyPr wrap="square">
-            <a:spAutoFit/>
-          </a:bodyPr>
-          <a:lstStyle/>
-          <a:p>
-            <a:pPr algn="l">
-              <a:spcAft>
-                <a:spcPts val="0"/>
-              </a:spcAft>
-              <a:defRPr sz="1000" b="0">
-                <a:solidFill>
-                  <a:srgbClr val="6B6B6B"/>
-                </a:solidFill>
-                <a:latin typeface="Inter"/>
-              </a:defRPr>
-            </a:pPr>
-            <a:r>
-              <a:t>Trigger-basierte Ansprache bei Zins-</a:t>
-            </a:r>
-            <a:br/>
-            <a:r>
-              <a:t>änderungen, Ablauf Festhypothek,</a:t>
-            </a:r>
-            <a:br/>
-            <a:r>
-              <a:t>Lebensereignissen. RM gibt frei.</a:t>
-            </a:r>
-          </a:p>
-        </p:txBody>
-      </p:sp>
-      <p:sp>
-        <p:nvSpPr>
-          <p:cNvPr id="20" name="Rectangle 19"/>
-          <p:cNvSpPr/>
-          <p:nvPr/>
-        </p:nvSpPr>
-        <p:spPr>
-          <a:xfrm>
-            <a:off x="7406640" y="3108960"/>
-            <a:ext cx="3154680" cy="2560320"/>
+            <a:off x="731520" y="6903720"/>
+            <a:ext cx="13167360" cy="365760"/>
           </a:xfrm>
           <a:prstGeom prst="rect">
             <a:avLst/>
@@ -5951,539 +6698,31 @@
       </p:sp>
       <p:sp>
         <p:nvSpPr>
-          <p:cNvPr id="21" name="Rectangle 20"/>
-          <p:cNvSpPr/>
-          <p:nvPr/>
-        </p:nvSpPr>
-        <p:spPr>
-          <a:xfrm>
-            <a:off x="7406640" y="3108960"/>
-            <a:ext cx="3154680" cy="36576"/>
-          </a:xfrm>
-          <a:prstGeom prst="rect">
-            <a:avLst/>
-          </a:prstGeom>
-          <a:solidFill>
-            <a:srgbClr val="D97757"/>
-          </a:solidFill>
-          <a:ln>
-            <a:noFill/>
-          </a:ln>
-        </p:spPr>
-        <p:style>
-          <a:lnRef idx="1">
-            <a:schemeClr val="accent1"/>
-          </a:lnRef>
-          <a:fillRef idx="3">
-            <a:schemeClr val="accent1"/>
-          </a:fillRef>
-          <a:effectRef idx="2">
-            <a:schemeClr val="accent1"/>
-          </a:effectRef>
-          <a:fontRef idx="minor">
-            <a:schemeClr val="lt1"/>
-          </a:fontRef>
-        </p:style>
-        <p:txBody>
-          <a:bodyPr rtlCol="0" anchor="ctr"/>
-          <a:lstStyle/>
-          <a:p>
-            <a:pPr algn="ctr"/>
-          </a:p>
-        </p:txBody>
-      </p:sp>
-      <p:sp>
-        <p:nvSpPr>
-          <p:cNvPr id="22" name="TextBox 21"/>
-          <p:cNvSpPr txBox="1"/>
-          <p:nvPr/>
-        </p:nvSpPr>
-        <p:spPr>
-          <a:xfrm>
-            <a:off x="7589519" y="3246120"/>
-            <a:ext cx="365760" cy="274320"/>
-          </a:xfrm>
-          <a:prstGeom prst="rect">
-            <a:avLst/>
-          </a:prstGeom>
-          <a:noFill/>
-        </p:spPr>
-        <p:txBody>
-          <a:bodyPr wrap="square">
-            <a:spAutoFit/>
-          </a:bodyPr>
-          <a:lstStyle/>
-          <a:p>
-            <a:pPr algn="l">
-              <a:spcAft>
-                <a:spcPts val="0"/>
-              </a:spcAft>
-              <a:defRPr sz="1600" b="1">
-                <a:solidFill>
-                  <a:srgbClr val="D97757"/>
-                </a:solidFill>
-                <a:latin typeface="Inter"/>
-              </a:defRPr>
-            </a:pPr>
-            <a:r>
-              <a:t>C</a:t>
-            </a:r>
-          </a:p>
-        </p:txBody>
-      </p:sp>
-      <p:sp>
-        <p:nvSpPr>
-          <p:cNvPr id="23" name="TextBox 22"/>
-          <p:cNvSpPr txBox="1"/>
-          <p:nvPr/>
-        </p:nvSpPr>
-        <p:spPr>
-          <a:xfrm>
-            <a:off x="7955279" y="3273552"/>
-            <a:ext cx="2377440" cy="274320"/>
-          </a:xfrm>
-          <a:prstGeom prst="rect">
-            <a:avLst/>
-          </a:prstGeom>
-          <a:noFill/>
-        </p:spPr>
-        <p:txBody>
-          <a:bodyPr wrap="square">
-            <a:spAutoFit/>
-          </a:bodyPr>
-          <a:lstStyle/>
-          <a:p>
-            <a:pPr algn="l">
-              <a:spcAft>
-                <a:spcPts val="0"/>
-              </a:spcAft>
-              <a:defRPr sz="1100" b="1">
-                <a:solidFill>
-                  <a:srgbClr val="131314"/>
-                </a:solidFill>
-                <a:latin typeface="Inter"/>
-              </a:defRPr>
-            </a:pPr>
-            <a:r>
-              <a:t>Produktwissen &amp; Qualität</a:t>
-            </a:r>
-          </a:p>
-        </p:txBody>
-      </p:sp>
-      <p:sp>
-        <p:nvSpPr>
-          <p:cNvPr id="24" name="Rectangle 23"/>
-          <p:cNvSpPr/>
-          <p:nvPr/>
-        </p:nvSpPr>
-        <p:spPr>
-          <a:xfrm>
-            <a:off x="7589519" y="3611880"/>
-            <a:ext cx="2788920" cy="12700"/>
-          </a:xfrm>
-          <a:prstGeom prst="rect">
-            <a:avLst/>
-          </a:prstGeom>
-          <a:solidFill>
-            <a:srgbClr val="E8E7DD"/>
-          </a:solidFill>
-          <a:ln>
-            <a:noFill/>
-          </a:ln>
-        </p:spPr>
-        <p:style>
-          <a:lnRef idx="1">
-            <a:schemeClr val="accent1"/>
-          </a:lnRef>
-          <a:fillRef idx="3">
-            <a:schemeClr val="accent1"/>
-          </a:fillRef>
-          <a:effectRef idx="2">
-            <a:schemeClr val="accent1"/>
-          </a:effectRef>
-          <a:fontRef idx="minor">
-            <a:schemeClr val="lt1"/>
-          </a:fontRef>
-        </p:style>
-        <p:txBody>
-          <a:bodyPr rtlCol="0" anchor="ctr"/>
-          <a:lstStyle/>
-          <a:p>
-            <a:pPr algn="ctr"/>
-          </a:p>
-        </p:txBody>
-      </p:sp>
-      <p:sp>
-        <p:nvSpPr>
-          <p:cNvPr id="25" name="TextBox 24"/>
-          <p:cNvSpPr txBox="1"/>
-          <p:nvPr/>
-        </p:nvSpPr>
-        <p:spPr>
-          <a:xfrm>
-            <a:off x="7589519" y="3703320"/>
-            <a:ext cx="2743200" cy="1645920"/>
-          </a:xfrm>
-          <a:prstGeom prst="rect">
-            <a:avLst/>
-          </a:prstGeom>
-          <a:noFill/>
-        </p:spPr>
-        <p:txBody>
-          <a:bodyPr wrap="square">
-            <a:spAutoFit/>
-          </a:bodyPr>
-          <a:lstStyle/>
-          <a:p>
-            <a:pPr algn="l">
-              <a:spcAft>
-                <a:spcPts val="0"/>
-              </a:spcAft>
-              <a:defRPr sz="1000" b="0">
-                <a:solidFill>
-                  <a:srgbClr val="6B6B6B"/>
-                </a:solidFill>
-                <a:latin typeface="Inter"/>
-              </a:defRPr>
-            </a:pPr>
-            <a:r>
-              <a:t>Einheitliches, aktuelles Produktwissen</a:t>
-            </a:r>
-            <a:br/>
-            <a:r>
-              <a:t>über alle 212 Banken. In Echtzeit,</a:t>
-            </a:r>
-            <a:br/>
-            <a:r>
-              <a:t>drei Sprachen, audit-fähig.</a:t>
-            </a:r>
-          </a:p>
-        </p:txBody>
-      </p:sp>
-      <p:sp>
-        <p:nvSpPr>
-          <p:cNvPr id="26" name="Rectangle 25"/>
-          <p:cNvSpPr/>
-          <p:nvPr/>
-        </p:nvSpPr>
-        <p:spPr>
-          <a:xfrm>
-            <a:off x="10744200" y="3108960"/>
-            <a:ext cx="3154680" cy="2560320"/>
-          </a:xfrm>
-          <a:prstGeom prst="rect">
-            <a:avLst/>
-          </a:prstGeom>
-          <a:solidFill>
-            <a:srgbClr val="FFFFFF"/>
-          </a:solidFill>
-          <a:ln>
-            <a:noFill/>
-          </a:ln>
-        </p:spPr>
-        <p:style>
-          <a:lnRef idx="1">
-            <a:schemeClr val="accent1"/>
-          </a:lnRef>
-          <a:fillRef idx="3">
-            <a:schemeClr val="accent1"/>
-          </a:fillRef>
-          <a:effectRef idx="2">
-            <a:schemeClr val="accent1"/>
-          </a:effectRef>
-          <a:fontRef idx="minor">
-            <a:schemeClr val="lt1"/>
-          </a:fontRef>
-        </p:style>
-        <p:txBody>
-          <a:bodyPr rtlCol="0" anchor="ctr"/>
-          <a:lstStyle/>
-          <a:p>
-            <a:pPr algn="ctr"/>
-          </a:p>
-        </p:txBody>
-      </p:sp>
-      <p:sp>
-        <p:nvSpPr>
-          <p:cNvPr id="27" name="Rectangle 26"/>
-          <p:cNvSpPr/>
-          <p:nvPr/>
-        </p:nvSpPr>
-        <p:spPr>
-          <a:xfrm>
-            <a:off x="10744200" y="3108960"/>
-            <a:ext cx="3154680" cy="36576"/>
-          </a:xfrm>
-          <a:prstGeom prst="rect">
-            <a:avLst/>
-          </a:prstGeom>
-          <a:solidFill>
-            <a:srgbClr val="D97757"/>
-          </a:solidFill>
-          <a:ln>
-            <a:noFill/>
-          </a:ln>
-        </p:spPr>
-        <p:style>
-          <a:lnRef idx="1">
-            <a:schemeClr val="accent1"/>
-          </a:lnRef>
-          <a:fillRef idx="3">
-            <a:schemeClr val="accent1"/>
-          </a:fillRef>
-          <a:effectRef idx="2">
-            <a:schemeClr val="accent1"/>
-          </a:effectRef>
-          <a:fontRef idx="minor">
-            <a:schemeClr val="lt1"/>
-          </a:fontRef>
-        </p:style>
-        <p:txBody>
-          <a:bodyPr rtlCol="0" anchor="ctr"/>
-          <a:lstStyle/>
-          <a:p>
-            <a:pPr algn="ctr"/>
-          </a:p>
-        </p:txBody>
-      </p:sp>
-      <p:sp>
-        <p:nvSpPr>
-          <p:cNvPr id="28" name="TextBox 27"/>
-          <p:cNvSpPr txBox="1"/>
-          <p:nvPr/>
-        </p:nvSpPr>
-        <p:spPr>
-          <a:xfrm>
-            <a:off x="10927080" y="3246120"/>
-            <a:ext cx="365760" cy="274320"/>
-          </a:xfrm>
-          <a:prstGeom prst="rect">
-            <a:avLst/>
-          </a:prstGeom>
-          <a:noFill/>
-        </p:spPr>
-        <p:txBody>
-          <a:bodyPr wrap="square">
-            <a:spAutoFit/>
-          </a:bodyPr>
-          <a:lstStyle/>
-          <a:p>
-            <a:pPr algn="l">
-              <a:spcAft>
-                <a:spcPts val="0"/>
-              </a:spcAft>
-              <a:defRPr sz="1600" b="1">
-                <a:solidFill>
-                  <a:srgbClr val="D97757"/>
-                </a:solidFill>
-                <a:latin typeface="Inter"/>
-              </a:defRPr>
-            </a:pPr>
-            <a:r>
-              <a:t>D</a:t>
-            </a:r>
-          </a:p>
-        </p:txBody>
-      </p:sp>
-      <p:sp>
-        <p:nvSpPr>
-          <p:cNvPr id="29" name="TextBox 28"/>
-          <p:cNvSpPr txBox="1"/>
-          <p:nvPr/>
-        </p:nvSpPr>
-        <p:spPr>
-          <a:xfrm>
-            <a:off x="11292840" y="3273552"/>
-            <a:ext cx="2377440" cy="274320"/>
-          </a:xfrm>
-          <a:prstGeom prst="rect">
-            <a:avLst/>
-          </a:prstGeom>
-          <a:noFill/>
-        </p:spPr>
-        <p:txBody>
-          <a:bodyPr wrap="square">
-            <a:spAutoFit/>
-          </a:bodyPr>
-          <a:lstStyle/>
-          <a:p>
-            <a:pPr algn="l">
-              <a:spcAft>
-                <a:spcPts val="0"/>
-              </a:spcAft>
-              <a:defRPr sz="1100" b="1">
-                <a:solidFill>
-                  <a:srgbClr val="131314"/>
-                </a:solidFill>
-                <a:latin typeface="Inter"/>
-              </a:defRPr>
-            </a:pPr>
-            <a:r>
-              <a:t>Erster Kundenkontakt</a:t>
-            </a:r>
-          </a:p>
-        </p:txBody>
-      </p:sp>
-      <p:sp>
-        <p:nvSpPr>
-          <p:cNvPr id="30" name="Rectangle 29"/>
-          <p:cNvSpPr/>
-          <p:nvPr/>
-        </p:nvSpPr>
-        <p:spPr>
-          <a:xfrm>
-            <a:off x="10927080" y="3611880"/>
-            <a:ext cx="2788920" cy="12700"/>
-          </a:xfrm>
-          <a:prstGeom prst="rect">
-            <a:avLst/>
-          </a:prstGeom>
-          <a:solidFill>
-            <a:srgbClr val="E8E7DD"/>
-          </a:solidFill>
-          <a:ln>
-            <a:noFill/>
-          </a:ln>
-        </p:spPr>
-        <p:style>
-          <a:lnRef idx="1">
-            <a:schemeClr val="accent1"/>
-          </a:lnRef>
-          <a:fillRef idx="3">
-            <a:schemeClr val="accent1"/>
-          </a:fillRef>
-          <a:effectRef idx="2">
-            <a:schemeClr val="accent1"/>
-          </a:effectRef>
-          <a:fontRef idx="minor">
-            <a:schemeClr val="lt1"/>
-          </a:fontRef>
-        </p:style>
-        <p:txBody>
-          <a:bodyPr rtlCol="0" anchor="ctr"/>
-          <a:lstStyle/>
-          <a:p>
-            <a:pPr algn="ctr"/>
-          </a:p>
-        </p:txBody>
-      </p:sp>
-      <p:sp>
-        <p:nvSpPr>
-          <p:cNvPr id="31" name="TextBox 30"/>
-          <p:cNvSpPr txBox="1"/>
-          <p:nvPr/>
-        </p:nvSpPr>
-        <p:spPr>
-          <a:xfrm>
-            <a:off x="10927080" y="3703320"/>
-            <a:ext cx="2743200" cy="1645920"/>
-          </a:xfrm>
-          <a:prstGeom prst="rect">
-            <a:avLst/>
-          </a:prstGeom>
-          <a:noFill/>
-        </p:spPr>
-        <p:txBody>
-          <a:bodyPr wrap="square">
-            <a:spAutoFit/>
-          </a:bodyPr>
-          <a:lstStyle/>
-          <a:p>
-            <a:pPr algn="l">
-              <a:spcAft>
-                <a:spcPts val="0"/>
-              </a:spcAft>
-              <a:defRPr sz="1000" b="0">
-                <a:solidFill>
-                  <a:srgbClr val="6B6B6B"/>
-                </a:solidFill>
-                <a:latin typeface="Inter"/>
-              </a:defRPr>
-            </a:pPr>
-            <a:r>
-              <a:t>Routineanfragen automatisch beantwortet —</a:t>
-            </a:r>
-            <a:br/>
-            <a:r>
-              <a:t>Chat und Telefon, DE/FR/IT.</a:t>
-            </a:r>
-            <a:br/>
-            <a:r>
-              <a:t>Berater-Kapazität freisetzen.</a:t>
-            </a:r>
-          </a:p>
-        </p:txBody>
-      </p:sp>
-      <p:sp>
-        <p:nvSpPr>
-          <p:cNvPr id="32" name="Rectangle 31"/>
-          <p:cNvSpPr/>
-          <p:nvPr/>
-        </p:nvSpPr>
-        <p:spPr>
-          <a:xfrm>
-            <a:off x="731520" y="5943600"/>
-            <a:ext cx="13167360" cy="502920"/>
-          </a:xfrm>
-          <a:prstGeom prst="rect">
-            <a:avLst/>
-          </a:prstGeom>
-          <a:solidFill>
-            <a:srgbClr val="FFFFFF"/>
-          </a:solidFill>
-          <a:ln>
-            <a:noFill/>
-          </a:ln>
-        </p:spPr>
-        <p:style>
-          <a:lnRef idx="1">
-            <a:schemeClr val="accent1"/>
-          </a:lnRef>
-          <a:fillRef idx="3">
-            <a:schemeClr val="accent1"/>
-          </a:fillRef>
-          <a:effectRef idx="2">
-            <a:schemeClr val="accent1"/>
-          </a:effectRef>
-          <a:fontRef idx="minor">
-            <a:schemeClr val="lt1"/>
-          </a:fontRef>
-        </p:style>
-        <p:txBody>
-          <a:bodyPr rtlCol="0" anchor="ctr"/>
-          <a:lstStyle/>
-          <a:p>
-            <a:pPr algn="ctr"/>
-          </a:p>
-        </p:txBody>
-      </p:sp>
-      <p:sp>
-        <p:nvSpPr>
-          <p:cNvPr id="33" name="TextBox 32"/>
-          <p:cNvSpPr txBox="1"/>
-          <p:nvPr/>
-        </p:nvSpPr>
-        <p:spPr>
-          <a:xfrm>
-            <a:off x="914400" y="6016752"/>
-            <a:ext cx="3108960" cy="320040"/>
-          </a:xfrm>
-          <a:prstGeom prst="rect">
-            <a:avLst/>
-          </a:prstGeom>
-          <a:noFill/>
-        </p:spPr>
-        <p:txBody>
-          <a:bodyPr wrap="square">
-            <a:spAutoFit/>
-          </a:bodyPr>
-          <a:lstStyle/>
-          <a:p>
-            <a:pPr algn="l">
-              <a:spcAft>
-                <a:spcPts val="0"/>
-              </a:spcAft>
-              <a:defRPr sz="1100" b="1">
+          <p:cNvPr id="38" name="TextBox 37"/>
+          <p:cNvSpPr txBox="1"/>
+          <p:nvPr/>
+        </p:nvSpPr>
+        <p:spPr>
+          <a:xfrm>
+            <a:off x="914400" y="6949440"/>
+            <a:ext cx="3108960" cy="274320"/>
+          </a:xfrm>
+          <a:prstGeom prst="rect">
+            <a:avLst/>
+          </a:prstGeom>
+          <a:noFill/>
+        </p:spPr>
+        <p:txBody>
+          <a:bodyPr wrap="square">
+            <a:spAutoFit/>
+          </a:bodyPr>
+          <a:lstStyle/>
+          <a:p>
+            <a:pPr algn="l">
+              <a:spcAft>
+                <a:spcPts val="0"/>
+              </a:spcAft>
+              <a:defRPr sz="1000" b="1">
                 <a:solidFill>
                   <a:srgbClr val="2D8A4E"/>
                 </a:solidFill>
@@ -6498,31 +6737,31 @@
       </p:sp>
       <p:sp>
         <p:nvSpPr>
-          <p:cNvPr id="34" name="TextBox 33"/>
-          <p:cNvSpPr txBox="1"/>
-          <p:nvPr/>
-        </p:nvSpPr>
-        <p:spPr>
-          <a:xfrm>
-            <a:off x="4206240" y="6016752"/>
-            <a:ext cx="3108960" cy="320040"/>
-          </a:xfrm>
-          <a:prstGeom prst="rect">
-            <a:avLst/>
-          </a:prstGeom>
-          <a:noFill/>
-        </p:spPr>
-        <p:txBody>
-          <a:bodyPr wrap="square">
-            <a:spAutoFit/>
-          </a:bodyPr>
-          <a:lstStyle/>
-          <a:p>
-            <a:pPr algn="l">
-              <a:spcAft>
-                <a:spcPts val="0"/>
-              </a:spcAft>
-              <a:defRPr sz="1100" b="1">
+          <p:cNvPr id="39" name="TextBox 38"/>
+          <p:cNvSpPr txBox="1"/>
+          <p:nvPr/>
+        </p:nvSpPr>
+        <p:spPr>
+          <a:xfrm>
+            <a:off x="4206240" y="6949440"/>
+            <a:ext cx="3108960" cy="274320"/>
+          </a:xfrm>
+          <a:prstGeom prst="rect">
+            <a:avLst/>
+          </a:prstGeom>
+          <a:noFill/>
+        </p:spPr>
+        <p:txBody>
+          <a:bodyPr wrap="square">
+            <a:spAutoFit/>
+          </a:bodyPr>
+          <a:lstStyle/>
+          <a:p>
+            <a:pPr algn="l">
+              <a:spcAft>
+                <a:spcPts val="0"/>
+              </a:spcAft>
+              <a:defRPr sz="1000" b="1">
                 <a:solidFill>
                   <a:srgbClr val="2D8A4E"/>
                 </a:solidFill>
@@ -6537,31 +6776,31 @@
       </p:sp>
       <p:sp>
         <p:nvSpPr>
-          <p:cNvPr id="35" name="TextBox 34"/>
-          <p:cNvSpPr txBox="1"/>
-          <p:nvPr/>
-        </p:nvSpPr>
-        <p:spPr>
-          <a:xfrm>
-            <a:off x="7498079" y="6016752"/>
-            <a:ext cx="3108960" cy="320040"/>
-          </a:xfrm>
-          <a:prstGeom prst="rect">
-            <a:avLst/>
-          </a:prstGeom>
-          <a:noFill/>
-        </p:spPr>
-        <p:txBody>
-          <a:bodyPr wrap="square">
-            <a:spAutoFit/>
-          </a:bodyPr>
-          <a:lstStyle/>
-          <a:p>
-            <a:pPr algn="l">
-              <a:spcAft>
-                <a:spcPts val="0"/>
-              </a:spcAft>
-              <a:defRPr sz="1100" b="1">
+          <p:cNvPr id="40" name="TextBox 39"/>
+          <p:cNvSpPr txBox="1"/>
+          <p:nvPr/>
+        </p:nvSpPr>
+        <p:spPr>
+          <a:xfrm>
+            <a:off x="7498079" y="6949440"/>
+            <a:ext cx="3108960" cy="274320"/>
+          </a:xfrm>
+          <a:prstGeom prst="rect">
+            <a:avLst/>
+          </a:prstGeom>
+          <a:noFill/>
+        </p:spPr>
+        <p:txBody>
+          <a:bodyPr wrap="square">
+            <a:spAutoFit/>
+          </a:bodyPr>
+          <a:lstStyle/>
+          <a:p>
+            <a:pPr algn="l">
+              <a:spcAft>
+                <a:spcPts val="0"/>
+              </a:spcAft>
+              <a:defRPr sz="1000" b="1">
                 <a:solidFill>
                   <a:srgbClr val="2D8A4E"/>
                 </a:solidFill>
@@ -6569,38 +6808,38 @@
               </a:defRPr>
             </a:pPr>
             <a:r>
-              <a:t>✓  Kein grosses Budget</a:t>
-            </a:r>
-          </a:p>
-        </p:txBody>
-      </p:sp>
-      <p:sp>
-        <p:nvSpPr>
-          <p:cNvPr id="36" name="TextBox 35"/>
-          <p:cNvSpPr txBox="1"/>
-          <p:nvPr/>
-        </p:nvSpPr>
-        <p:spPr>
-          <a:xfrm>
-            <a:off x="10789920" y="6016752"/>
-            <a:ext cx="3108960" cy="320040"/>
-          </a:xfrm>
-          <a:prstGeom prst="rect">
-            <a:avLst/>
-          </a:prstGeom>
-          <a:noFill/>
-        </p:spPr>
-        <p:txBody>
-          <a:bodyPr wrap="square">
-            <a:spAutoFit/>
-          </a:bodyPr>
-          <a:lstStyle/>
-          <a:p>
-            <a:pPr algn="l">
-              <a:spcAft>
-                <a:spcPts val="0"/>
-              </a:spcAft>
-              <a:defRPr sz="1100" b="1">
+              <a:t>✓  Kein Budget erforderlich</a:t>
+            </a:r>
+          </a:p>
+        </p:txBody>
+      </p:sp>
+      <p:sp>
+        <p:nvSpPr>
+          <p:cNvPr id="41" name="TextBox 40"/>
+          <p:cNvSpPr txBox="1"/>
+          <p:nvPr/>
+        </p:nvSpPr>
+        <p:spPr>
+          <a:xfrm>
+            <a:off x="10789920" y="6949440"/>
+            <a:ext cx="3108960" cy="274320"/>
+          </a:xfrm>
+          <a:prstGeom prst="rect">
+            <a:avLst/>
+          </a:prstGeom>
+          <a:noFill/>
+        </p:spPr>
+        <p:txBody>
+          <a:bodyPr wrap="square">
+            <a:spAutoFit/>
+          </a:bodyPr>
+          <a:lstStyle/>
+          <a:p>
+            <a:pPr algn="l">
+              <a:spcAft>
+                <a:spcPts val="0"/>
+              </a:spcAft>
+              <a:defRPr sz="1000" b="1">
                 <a:solidFill>
                   <a:srgbClr val="2D8A4E"/>
                 </a:solidFill>
@@ -6615,89 +6854,7 @@
       </p:sp>
       <p:sp>
         <p:nvSpPr>
-          <p:cNvPr id="37" name="Rectangle 36"/>
-          <p:cNvSpPr/>
-          <p:nvPr/>
-        </p:nvSpPr>
-        <p:spPr>
-          <a:xfrm>
-            <a:off x="731520" y="6675120"/>
-            <a:ext cx="13167360" cy="457200"/>
-          </a:xfrm>
-          <a:prstGeom prst="rect">
-            <a:avLst/>
-          </a:prstGeom>
-          <a:solidFill>
-            <a:srgbClr val="F5EBE4"/>
-          </a:solidFill>
-          <a:ln>
-            <a:noFill/>
-          </a:ln>
-        </p:spPr>
-        <p:style>
-          <a:lnRef idx="1">
-            <a:schemeClr val="accent1"/>
-          </a:lnRef>
-          <a:fillRef idx="3">
-            <a:schemeClr val="accent1"/>
-          </a:fillRef>
-          <a:effectRef idx="2">
-            <a:schemeClr val="accent1"/>
-          </a:effectRef>
-          <a:fontRef idx="minor">
-            <a:schemeClr val="lt1"/>
-          </a:fontRef>
-        </p:style>
-        <p:txBody>
-          <a:bodyPr rtlCol="0" anchor="ctr"/>
-          <a:lstStyle/>
-          <a:p>
-            <a:pPr algn="ctr"/>
-          </a:p>
-        </p:txBody>
-      </p:sp>
-      <p:sp>
-        <p:nvSpPr>
-          <p:cNvPr id="38" name="TextBox 37"/>
-          <p:cNvSpPr txBox="1"/>
-          <p:nvPr/>
-        </p:nvSpPr>
-        <p:spPr>
-          <a:xfrm>
-            <a:off x="914400" y="6720840"/>
-            <a:ext cx="12801600" cy="365760"/>
-          </a:xfrm>
-          <a:prstGeom prst="rect">
-            <a:avLst/>
-          </a:prstGeom>
-          <a:noFill/>
-        </p:spPr>
-        <p:txBody>
-          <a:bodyPr wrap="square">
-            <a:spAutoFit/>
-          </a:bodyPr>
-          <a:lstStyle/>
-          <a:p>
-            <a:pPr algn="l">
-              <a:spcAft>
-                <a:spcPts val="0"/>
-              </a:spcAft>
-              <a:defRPr sz="1100" b="1">
-                <a:solidFill>
-                  <a:srgbClr val="2A2A2A"/>
-                </a:solidFill>
-                <a:latin typeface="Inter"/>
-              </a:defRPr>
-            </a:pPr>
-            <a:r>
-              <a:t>Dieses Vorgehen hat sich bewährt: Mit Allianz Suisse haben wir einen identischen Test-and-Learn-Ansatz erfolgreich umgesetzt.</a:t>
-            </a:r>
-          </a:p>
-        </p:txBody>
-      </p:sp>
-      <p:sp>
-        <p:nvSpPr>
-          <p:cNvPr id="39" name="TextBox 38"/>
+          <p:cNvPr id="42" name="TextBox 41"/>
           <p:cNvSpPr txBox="1"/>
           <p:nvPr/>
         </p:nvSpPr>
@@ -6736,7 +6893,7 @@
       </p:sp>
       <p:sp>
         <p:nvSpPr>
-          <p:cNvPr id="40" name="TextBox 39"/>
+          <p:cNvPr id="43" name="TextBox 42"/>
           <p:cNvSpPr txBox="1"/>
           <p:nvPr/>
         </p:nvSpPr>
@@ -8957,7 +9114,7 @@
               </a:defRPr>
             </a:pPr>
             <a:r>
-              <a:t>SZENARIEN</a:t>
+              <a:t>IDEENBACKLOG</a:t>
             </a:r>
           </a:p>
         </p:txBody>
@@ -8996,7 +9153,7 @@
               </a:defRPr>
             </a:pPr>
             <a:r>
-              <a:t>Vier Szenarien für den Vertrieb</a:t>
+              <a:t>Mögliche Szenarien — entlang des Vertriebsprozesses</a:t>
             </a:r>
           </a:p>
         </p:txBody>
@@ -9078,7 +9235,7 @@
               </a:defRPr>
             </a:pPr>
             <a:r>
-              <a:t>Jedes Szenario steht für sich. Wir empfehlen, mit einem zu beginnen — welches, entscheiden Sie.</a:t>
+              <a:t>Diese Ideen sind ein Ausgangspunkt. Was davon relevant ist und was fehlt, erarbeiten wir gemeinsam.</a:t>
             </a:r>
           </a:p>
         </p:txBody>
@@ -16945,7 +17102,7 @@
               </a:defRPr>
             </a:pPr>
             <a:r>
-              <a:t>Big Picture</a:t>
+              <a:t>Discovery-Workshop</a:t>
             </a:r>
           </a:p>
         </p:txBody>
@@ -17027,28 +17184,24 @@
               </a:defRPr>
             </a:pPr>
             <a:r>
-              <a:t>Gemeinsam erarbeiten:</a:t>
+              <a:t>Halber Tag mit Ivo und 1–2</a:t>
             </a:r>
             <a:br/>
             <a:r>
-              <a:t>«Zukunft des Vertriebs mit AI.»</a:t>
+              <a:t>Kundenberatern. Vertriebsprozess</a:t>
             </a:r>
             <a:br/>
             <a:r>
-              <a:t>Wo liegt das grösste Potenzial?</a:t>
-            </a:r>
-            <a:br/>
-            <a:r>
-              <a:t>Welcher Use Case zuerst?</a:t>
+              <a:t>und Kundenprozess analysieren.</a:t>
             </a:r>
             <a:br/>
             <a:br/>
             <a:r>
-              <a:t>Ein halber Tag Workshop.</a:t>
+              <a:t>Wo hat AI den grössten Hebel?</a:t>
             </a:r>
             <a:br/>
             <a:r>
-              <a:t>Ergebnis: priorisierte Szenarien.</a:t>
+              <a:t>Was ist realistisch, was nicht?</a:t>
             </a:r>
           </a:p>
         </p:txBody>
@@ -17251,7 +17404,7 @@
               </a:defRPr>
             </a:pPr>
             <a:r>
-              <a:t>Konkreter Use Case</a:t>
+              <a:t>Handlungsempfehlung</a:t>
             </a:r>
           </a:p>
         </p:txBody>
@@ -17333,28 +17486,24 @@
               </a:defRPr>
             </a:pPr>
             <a:r>
-              <a:t>Ausarbeitung eines Szenarios</a:t>
+              <a:t>Salesteq erarbeitet eine konkrete</a:t>
             </a:r>
             <a:br/>
             <a:r>
-              <a:t>für eine Raiffeisenbank.</a:t>
+              <a:t>Handlungsempfehlung — priorisierte</a:t>
             </a:r>
             <a:br/>
             <a:r>
-              <a:t>Z.B. Training-Sparringspartner</a:t>
-            </a:r>
-            <a:br/>
-            <a:r>
-              <a:t>oder proaktive Kundenansprache.</a:t>
+              <a:t>Szenarien, Aufwand, Nutzen.</a:t>
             </a:r>
             <a:br/>
             <a:br/>
             <a:r>
-              <a:t>Funktionierender Prototyp,</a:t>
+              <a:t>Ein Dokument, das Ivo intern</a:t>
             </a:r>
             <a:br/>
             <a:r>
-              <a:t>keine Slides.</a:t>
+              <a:t>mit IT und Stakeholdern testen kann.</a:t>
             </a:r>
           </a:p>
         </p:txBody>
@@ -17393,7 +17542,7 @@
               </a:defRPr>
             </a:pPr>
             <a:r>
-              <a:t>Woche 3–8</a:t>
+              <a:t>Woche 3–4</a:t>
             </a:r>
           </a:p>
         </p:txBody>
@@ -17557,7 +17706,7 @@
               </a:defRPr>
             </a:pPr>
             <a:r>
-              <a:t>Entscheiden</a:t>
+              <a:t>Gemeinsam entscheiden</a:t>
             </a:r>
           </a:p>
         </p:txBody>
@@ -17639,24 +17788,24 @@
               </a:defRPr>
             </a:pPr>
             <a:r>
-              <a:t>Ergebnisse gemeinsam bewerten.</a:t>
+              <a:t>Auf Basis der Empfehlung:</a:t>
             </a:r>
             <a:br/>
             <a:r>
-              <a:t>Feedback der Berater einholen.</a:t>
+              <a:t>nächste Schritte festlegen.</a:t>
             </a:r>
             <a:br/>
             <a:br/>
             <a:r>
-              <a:t>Wenn es funktioniert: skalieren.</a:t>
+              <a:t>Ob Prototyp, Pilotprojekt oder</a:t>
             </a:r>
             <a:br/>
             <a:r>
-              <a:t>Wenn nicht: kein Schaden,</a:t>
+              <a:t>weitere Vertiefung — die Entscheidung</a:t>
             </a:r>
             <a:br/>
             <a:r>
-              <a:t>viel gelernt.</a:t>
+              <a:t>liegt bei Raiffeisen.</a:t>
             </a:r>
           </a:p>
         </p:txBody>
@@ -17695,7 +17844,7 @@
               </a:defRPr>
             </a:pPr>
             <a:r>
-              <a:t>Woche 9–12</a:t>
+              <a:t>Woche 5–6</a:t>
             </a:r>
           </a:p>
         </p:txBody>

--- a/Salesteq-Raiffeisen-Scenario-Branded.pptx
+++ b/Salesteq-Raiffeisen-Scenario-Branded.pptx
@@ -3135,7 +3135,7 @@
                 <a:solidFill>
                   <a:srgbClr val="FAF9F0"/>
                 </a:solidFill>
-                <a:latin typeface="Inter"/>
+                <a:latin typeface="Space Grotesk"/>
               </a:defRPr>
             </a:pPr>
             <a:r>
@@ -3256,7 +3256,7 @@
                 <a:solidFill>
                   <a:srgbClr val="FAF9F0"/>
                 </a:solidFill>
-                <a:latin typeface="Inter"/>
+                <a:latin typeface="Space Grotesk"/>
               </a:defRPr>
             </a:pPr>
             <a:r>
@@ -3299,7 +3299,7 @@
                 <a:solidFill>
                   <a:srgbClr val="3D3D3F"/>
                 </a:solidFill>
-                <a:latin typeface="Inter"/>
+                <a:latin typeface="Space Grotesk"/>
               </a:defRPr>
             </a:pPr>
             <a:r>
@@ -3381,7 +3381,7 @@
                 <a:solidFill>
                   <a:srgbClr val="FAF9F0"/>
                 </a:solidFill>
-                <a:latin typeface="Inter"/>
+                <a:latin typeface="Space Grotesk"/>
               </a:defRPr>
             </a:pPr>
             <a:r>
@@ -3420,7 +3420,7 @@
                 <a:solidFill>
                   <a:srgbClr val="3D3D3F"/>
                 </a:solidFill>
-                <a:latin typeface="Inter"/>
+                <a:latin typeface="Space Grotesk"/>
               </a:defRPr>
             </a:pPr>
             <a:r>
@@ -3498,7 +3498,7 @@
                 <a:solidFill>
                   <a:srgbClr val="FAF9F0"/>
                 </a:solidFill>
-                <a:latin typeface="Inter"/>
+                <a:latin typeface="Space Grotesk"/>
               </a:defRPr>
             </a:pPr>
             <a:r>
@@ -3537,7 +3537,7 @@
                 <a:solidFill>
                   <a:srgbClr val="3D3D3F"/>
                 </a:solidFill>
-                <a:latin typeface="Inter"/>
+                <a:latin typeface="Space Grotesk"/>
               </a:defRPr>
             </a:pPr>
             <a:r>
@@ -3615,7 +3615,7 @@
                 <a:solidFill>
                   <a:srgbClr val="FAF9F0"/>
                 </a:solidFill>
-                <a:latin typeface="Inter"/>
+                <a:latin typeface="Space Grotesk"/>
               </a:defRPr>
             </a:pPr>
             <a:r>
@@ -3716,7 +3716,7 @@
     <p:bg>
       <p:bgPr>
         <a:solidFill>
-          <a:srgbClr val="FAF9F0"/>
+          <a:srgbClr val="FFFFFF"/>
         </a:solidFill>
         <a:effectLst/>
       </p:bgPr>
@@ -3797,7 +3797,7 @@
                 <a:solidFill>
                   <a:srgbClr val="131314"/>
                 </a:solidFill>
-                <a:latin typeface="Inter"/>
+                <a:latin typeface="Space Grotesk"/>
               </a:defRPr>
             </a:pPr>
             <a:r>
@@ -3922,7 +3922,7 @@
                 <a:solidFill>
                   <a:srgbClr val="131314"/>
                 </a:solidFill>
-                <a:latin typeface="Inter"/>
+                <a:latin typeface="Space Grotesk"/>
               </a:defRPr>
             </a:pPr>
             <a:r>
@@ -3964,7 +3964,7 @@
                 <a:solidFill>
                   <a:srgbClr val="6B6B6B"/>
                 </a:solidFill>
-                <a:latin typeface="Inter"/>
+                <a:latin typeface="Space Grotesk"/>
               </a:defRPr>
             </a:pPr>
             <a:r>
@@ -3983,7 +3983,7 @@
                 <a:solidFill>
                   <a:srgbClr val="6B6B6B"/>
                 </a:solidFill>
-                <a:latin typeface="Inter"/>
+                <a:latin typeface="Space Grotesk"/>
               </a:defRPr>
             </a:pPr>
             <a:r>
@@ -4007,7 +4007,7 @@
             <a:avLst/>
           </a:prstGeom>
           <a:solidFill>
-            <a:srgbClr val="E8E7DD"/>
+            <a:srgbClr val="E8E8E6"/>
           </a:solidFill>
           <a:ln>
             <a:noFill/>
@@ -4065,7 +4065,7 @@
                 <a:solidFill>
                   <a:srgbClr val="131314"/>
                 </a:solidFill>
-                <a:latin typeface="Inter"/>
+                <a:latin typeface="Space Grotesk"/>
               </a:defRPr>
             </a:pPr>
             <a:r>
@@ -4107,7 +4107,7 @@
                 <a:solidFill>
                   <a:srgbClr val="2A2A2A"/>
                 </a:solidFill>
-                <a:latin typeface="Inter"/>
+                <a:latin typeface="Space Grotesk"/>
               </a:defRPr>
             </a:pPr>
             <a:r>
@@ -4126,7 +4126,7 @@
                 <a:solidFill>
                   <a:srgbClr val="2A2A2A"/>
                 </a:solidFill>
-                <a:latin typeface="Inter"/>
+                <a:latin typeface="Space Grotesk"/>
               </a:defRPr>
             </a:pPr>
             <a:r>
@@ -4145,7 +4145,7 @@
                 <a:solidFill>
                   <a:srgbClr val="2A2A2A"/>
                 </a:solidFill>
-                <a:latin typeface="Inter"/>
+                <a:latin typeface="Space Grotesk"/>
               </a:defRPr>
             </a:pPr>
             <a:r>
@@ -4270,7 +4270,7 @@
                 <a:solidFill>
                   <a:srgbClr val="131314"/>
                 </a:solidFill>
-                <a:latin typeface="Inter"/>
+                <a:latin typeface="Space Grotesk"/>
               </a:defRPr>
             </a:pPr>
             <a:r>
@@ -4294,7 +4294,7 @@
             <a:avLst/>
           </a:prstGeom>
           <a:solidFill>
-            <a:srgbClr val="E8E7DD"/>
+            <a:srgbClr val="E8E8E6"/>
           </a:solidFill>
           <a:ln>
             <a:noFill/>
@@ -4352,7 +4352,7 @@
                 <a:solidFill>
                   <a:srgbClr val="2A2A2A"/>
                 </a:solidFill>
-                <a:latin typeface="Inter"/>
+                <a:latin typeface="Space Grotesk"/>
               </a:defRPr>
             </a:pPr>
             <a:r>
@@ -4391,7 +4391,7 @@
                 <a:solidFill>
                   <a:srgbClr val="2A2A2A"/>
                 </a:solidFill>
-                <a:latin typeface="Inter"/>
+                <a:latin typeface="Space Grotesk"/>
               </a:defRPr>
             </a:pPr>
             <a:r>
@@ -4430,7 +4430,7 @@
                 <a:solidFill>
                   <a:srgbClr val="2A2A2A"/>
                 </a:solidFill>
-                <a:latin typeface="Inter"/>
+                <a:latin typeface="Space Grotesk"/>
               </a:defRPr>
             </a:pPr>
             <a:r>
@@ -4469,7 +4469,7 @@
                 <a:solidFill>
                   <a:srgbClr val="2A2A2A"/>
                 </a:solidFill>
-                <a:latin typeface="Inter"/>
+                <a:latin typeface="Space Grotesk"/>
               </a:defRPr>
             </a:pPr>
             <a:r>
@@ -4508,7 +4508,7 @@
                 <a:solidFill>
                   <a:srgbClr val="2A2A2A"/>
                 </a:solidFill>
-                <a:latin typeface="Inter"/>
+                <a:latin typeface="Space Grotesk"/>
               </a:defRPr>
             </a:pPr>
             <a:r>
@@ -4633,7 +4633,7 @@
                 <a:solidFill>
                   <a:srgbClr val="131314"/>
                 </a:solidFill>
-                <a:latin typeface="Inter"/>
+                <a:latin typeface="Space Grotesk"/>
               </a:defRPr>
             </a:pPr>
             <a:r>
@@ -4657,7 +4657,7 @@
             <a:avLst/>
           </a:prstGeom>
           <a:solidFill>
-            <a:srgbClr val="E8E7DD"/>
+            <a:srgbClr val="E8E8E6"/>
           </a:solidFill>
           <a:ln>
             <a:noFill/>
@@ -4715,7 +4715,7 @@
                 <a:solidFill>
                   <a:srgbClr val="2A2A2A"/>
                 </a:solidFill>
-                <a:latin typeface="Inter"/>
+                <a:latin typeface="Space Grotesk"/>
               </a:defRPr>
             </a:pPr>
             <a:r>
@@ -4754,7 +4754,7 @@
                 <a:solidFill>
                   <a:srgbClr val="2A2A2A"/>
                 </a:solidFill>
-                <a:latin typeface="Inter"/>
+                <a:latin typeface="Space Grotesk"/>
               </a:defRPr>
             </a:pPr>
             <a:r>
@@ -4793,7 +4793,7 @@
                 <a:solidFill>
                   <a:srgbClr val="2A2A2A"/>
                 </a:solidFill>
-                <a:latin typeface="Inter"/>
+                <a:latin typeface="Space Grotesk"/>
               </a:defRPr>
             </a:pPr>
             <a:r>
@@ -4832,7 +4832,7 @@
                 <a:solidFill>
                   <a:srgbClr val="2A2A2A"/>
                 </a:solidFill>
-                <a:latin typeface="Inter"/>
+                <a:latin typeface="Space Grotesk"/>
               </a:defRPr>
             </a:pPr>
             <a:r>
@@ -4914,7 +4914,7 @@
                 <a:solidFill>
                   <a:srgbClr val="FAF9F0"/>
                 </a:solidFill>
-                <a:latin typeface="Inter"/>
+                <a:latin typeface="Space Grotesk"/>
               </a:defRPr>
             </a:pPr>
             <a:r>
@@ -4953,7 +4953,7 @@
                 <a:solidFill>
                   <a:srgbClr val="3D3D3F"/>
                 </a:solidFill>
-                <a:latin typeface="Inter"/>
+                <a:latin typeface="Space Grotesk"/>
               </a:defRPr>
             </a:pPr>
             <a:r>
@@ -4992,7 +4992,7 @@
                 <a:solidFill>
                   <a:srgbClr val="3D3D3F"/>
                 </a:solidFill>
-                <a:latin typeface="Inter"/>
+                <a:latin typeface="Space Grotesk"/>
               </a:defRPr>
             </a:pPr>
             <a:r>
@@ -5031,7 +5031,7 @@
                 <a:solidFill>
                   <a:srgbClr val="3D3D3F"/>
                 </a:solidFill>
-                <a:latin typeface="Inter"/>
+                <a:latin typeface="Space Grotesk"/>
               </a:defRPr>
             </a:pPr>
             <a:r>
@@ -5140,7 +5140,7 @@
     <p:bg>
       <p:bgPr>
         <a:solidFill>
-          <a:srgbClr val="FAF9F0"/>
+          <a:srgbClr val="FFFFFF"/>
         </a:solidFill>
         <a:effectLst/>
       </p:bgPr>
@@ -5221,7 +5221,7 @@
                 <a:solidFill>
                   <a:srgbClr val="131314"/>
                 </a:solidFill>
-                <a:latin typeface="Inter"/>
+                <a:latin typeface="Space Grotesk"/>
               </a:defRPr>
             </a:pPr>
             <a:r>
@@ -5353,7 +5353,7 @@
                 <a:solidFill>
                   <a:srgbClr val="2A2A2A"/>
                 </a:solidFill>
-                <a:latin typeface="Inter"/>
+                <a:latin typeface="Space Grotesk"/>
               </a:defRPr>
             </a:pPr>
             <a:r>
@@ -5372,7 +5372,7 @@
                 <a:solidFill>
                   <a:srgbClr val="2A2A2A"/>
                 </a:solidFill>
-                <a:latin typeface="Inter"/>
+                <a:latin typeface="Space Grotesk"/>
               </a:defRPr>
             </a:pPr>
             <a:r>
@@ -5391,7 +5391,7 @@
                 <a:solidFill>
                   <a:srgbClr val="2A2A2A"/>
                 </a:solidFill>
-                <a:latin typeface="Inter"/>
+                <a:latin typeface="Space Grotesk"/>
               </a:defRPr>
             </a:pPr>
           </a:p>
@@ -5407,7 +5407,7 @@
                 <a:solidFill>
                   <a:srgbClr val="2A2A2A"/>
                 </a:solidFill>
-                <a:latin typeface="Inter"/>
+                <a:latin typeface="Space Grotesk"/>
               </a:defRPr>
             </a:pPr>
             <a:r>
@@ -5426,7 +5426,7 @@
                 <a:solidFill>
                   <a:srgbClr val="2A2A2A"/>
                 </a:solidFill>
-                <a:latin typeface="Inter"/>
+                <a:latin typeface="Space Grotesk"/>
               </a:defRPr>
             </a:pPr>
             <a:r>
@@ -5590,7 +5590,7 @@
                 <a:solidFill>
                   <a:srgbClr val="131314"/>
                 </a:solidFill>
-                <a:latin typeface="Inter"/>
+                <a:latin typeface="Space Grotesk"/>
               </a:defRPr>
             </a:pPr>
             <a:r>
@@ -5629,7 +5629,7 @@
                 <a:solidFill>
                   <a:srgbClr val="6B6B6B"/>
                 </a:solidFill>
-                <a:latin typeface="Inter"/>
+                <a:latin typeface="Space Grotesk"/>
               </a:defRPr>
             </a:pPr>
             <a:r>
@@ -5676,7 +5676,7 @@
                 <a:solidFill>
                   <a:srgbClr val="131314"/>
                 </a:solidFill>
-                <a:latin typeface="Inter"/>
+                <a:latin typeface="Space Grotesk"/>
               </a:defRPr>
             </a:pPr>
             <a:r>
@@ -5715,7 +5715,7 @@
                 <a:solidFill>
                   <a:srgbClr val="6B6B6B"/>
                 </a:solidFill>
-                <a:latin typeface="Inter"/>
+                <a:latin typeface="Space Grotesk"/>
               </a:defRPr>
             </a:pPr>
             <a:r>
@@ -5762,7 +5762,7 @@
                 <a:solidFill>
                   <a:srgbClr val="131314"/>
                 </a:solidFill>
-                <a:latin typeface="Inter"/>
+                <a:latin typeface="Space Grotesk"/>
               </a:defRPr>
             </a:pPr>
             <a:r>
@@ -5801,7 +5801,7 @@
                 <a:solidFill>
                   <a:srgbClr val="6B6B6B"/>
                 </a:solidFill>
-                <a:latin typeface="Inter"/>
+                <a:latin typeface="Space Grotesk"/>
               </a:defRPr>
             </a:pPr>
             <a:r>
@@ -5848,7 +5848,7 @@
                 <a:solidFill>
                   <a:srgbClr val="131314"/>
                 </a:solidFill>
-                <a:latin typeface="Inter"/>
+                <a:latin typeface="Space Grotesk"/>
               </a:defRPr>
             </a:pPr>
             <a:r>
@@ -5887,7 +5887,7 @@
                 <a:solidFill>
                   <a:srgbClr val="6B6B6B"/>
                 </a:solidFill>
-                <a:latin typeface="Inter"/>
+                <a:latin typeface="Space Grotesk"/>
               </a:defRPr>
             </a:pPr>
             <a:r>
@@ -6059,7 +6059,7 @@
                 <a:solidFill>
                   <a:srgbClr val="131314"/>
                 </a:solidFill>
-                <a:latin typeface="Inter"/>
+                <a:latin typeface="Space Grotesk"/>
               </a:defRPr>
             </a:pPr>
             <a:r>
@@ -6098,7 +6098,7 @@
                 <a:solidFill>
                   <a:srgbClr val="6B6B6B"/>
                 </a:solidFill>
-                <a:latin typeface="Inter"/>
+                <a:latin typeface="Space Grotesk"/>
               </a:defRPr>
             </a:pPr>
             <a:r>
@@ -6137,7 +6137,7 @@
                 <a:solidFill>
                   <a:srgbClr val="131314"/>
                 </a:solidFill>
-                <a:latin typeface="Inter"/>
+                <a:latin typeface="Space Grotesk"/>
               </a:defRPr>
             </a:pPr>
             <a:r>
@@ -6176,7 +6176,7 @@
                 <a:solidFill>
                   <a:srgbClr val="6B6B6B"/>
                 </a:solidFill>
-                <a:latin typeface="Inter"/>
+                <a:latin typeface="Space Grotesk"/>
               </a:defRPr>
             </a:pPr>
             <a:r>
@@ -6215,7 +6215,7 @@
                 <a:solidFill>
                   <a:srgbClr val="131314"/>
                 </a:solidFill>
-                <a:latin typeface="Inter"/>
+                <a:latin typeface="Space Grotesk"/>
               </a:defRPr>
             </a:pPr>
             <a:r>
@@ -6254,7 +6254,7 @@
                 <a:solidFill>
                   <a:srgbClr val="6B6B6B"/>
                 </a:solidFill>
-                <a:latin typeface="Inter"/>
+                <a:latin typeface="Space Grotesk"/>
               </a:defRPr>
             </a:pPr>
             <a:r>
@@ -6293,7 +6293,7 @@
                 <a:solidFill>
                   <a:srgbClr val="131314"/>
                 </a:solidFill>
-                <a:latin typeface="Inter"/>
+                <a:latin typeface="Space Grotesk"/>
               </a:defRPr>
             </a:pPr>
             <a:r>
@@ -6332,7 +6332,7 @@
                 <a:solidFill>
                   <a:srgbClr val="6B6B6B"/>
                 </a:solidFill>
-                <a:latin typeface="Inter"/>
+                <a:latin typeface="Space Grotesk"/>
               </a:defRPr>
             </a:pPr>
             <a:r>
@@ -6371,7 +6371,7 @@
                 <a:solidFill>
                   <a:srgbClr val="131314"/>
                 </a:solidFill>
-                <a:latin typeface="Inter"/>
+                <a:latin typeface="Space Grotesk"/>
               </a:defRPr>
             </a:pPr>
             <a:r>
@@ -6410,7 +6410,7 @@
                 <a:solidFill>
                   <a:srgbClr val="6B6B6B"/>
                 </a:solidFill>
-                <a:latin typeface="Inter"/>
+                <a:latin typeface="Space Grotesk"/>
               </a:defRPr>
             </a:pPr>
             <a:r>
@@ -6449,7 +6449,7 @@
                 <a:solidFill>
                   <a:srgbClr val="131314"/>
                 </a:solidFill>
-                <a:latin typeface="Inter"/>
+                <a:latin typeface="Space Grotesk"/>
               </a:defRPr>
             </a:pPr>
             <a:r>
@@ -6488,7 +6488,7 @@
                 <a:solidFill>
                   <a:srgbClr val="6B6B6B"/>
                 </a:solidFill>
-                <a:latin typeface="Inter"/>
+                <a:latin typeface="Space Grotesk"/>
               </a:defRPr>
             </a:pPr>
             <a:r>
@@ -6527,7 +6527,7 @@
                 <a:solidFill>
                   <a:srgbClr val="131314"/>
                 </a:solidFill>
-                <a:latin typeface="Inter"/>
+                <a:latin typeface="Space Grotesk"/>
               </a:defRPr>
             </a:pPr>
             <a:r>
@@ -6566,7 +6566,7 @@
                 <a:solidFill>
                   <a:srgbClr val="6B6B6B"/>
                 </a:solidFill>
-                <a:latin typeface="Inter"/>
+                <a:latin typeface="Space Grotesk"/>
               </a:defRPr>
             </a:pPr>
             <a:r>
@@ -6605,7 +6605,7 @@
                 <a:solidFill>
                   <a:srgbClr val="131314"/>
                 </a:solidFill>
-                <a:latin typeface="Inter"/>
+                <a:latin typeface="Space Grotesk"/>
               </a:defRPr>
             </a:pPr>
             <a:r>
@@ -6644,7 +6644,7 @@
                 <a:solidFill>
                   <a:srgbClr val="6B6B6B"/>
                 </a:solidFill>
-                <a:latin typeface="Inter"/>
+                <a:latin typeface="Space Grotesk"/>
               </a:defRPr>
             </a:pPr>
             <a:r>
@@ -6726,7 +6726,7 @@
                 <a:solidFill>
                   <a:srgbClr val="2D8A4E"/>
                 </a:solidFill>
-                <a:latin typeface="Inter"/>
+                <a:latin typeface="Space Grotesk"/>
               </a:defRPr>
             </a:pPr>
             <a:r>
@@ -6765,7 +6765,7 @@
                 <a:solidFill>
                   <a:srgbClr val="2D8A4E"/>
                 </a:solidFill>
-                <a:latin typeface="Inter"/>
+                <a:latin typeface="Space Grotesk"/>
               </a:defRPr>
             </a:pPr>
             <a:r>
@@ -6804,7 +6804,7 @@
                 <a:solidFill>
                   <a:srgbClr val="2D8A4E"/>
                 </a:solidFill>
-                <a:latin typeface="Inter"/>
+                <a:latin typeface="Space Grotesk"/>
               </a:defRPr>
             </a:pPr>
             <a:r>
@@ -6843,7 +6843,7 @@
                 <a:solidFill>
                   <a:srgbClr val="2D8A4E"/>
                 </a:solidFill>
-                <a:latin typeface="Inter"/>
+                <a:latin typeface="Space Grotesk"/>
               </a:defRPr>
             </a:pPr>
             <a:r>
@@ -6944,7 +6944,7 @@
     <p:bg>
       <p:bgPr>
         <a:solidFill>
-          <a:srgbClr val="FAF9F0"/>
+          <a:srgbClr val="FFFFFF"/>
         </a:solidFill>
         <a:effectLst/>
       </p:bgPr>
@@ -7025,7 +7025,7 @@
                 <a:solidFill>
                   <a:srgbClr val="131314"/>
                 </a:solidFill>
-                <a:latin typeface="Inter"/>
+                <a:latin typeface="Space Grotesk"/>
               </a:defRPr>
             </a:pPr>
             <a:r>
@@ -7107,7 +7107,7 @@
                 <a:solidFill>
                   <a:srgbClr val="6B6B6B"/>
                 </a:solidFill>
-                <a:latin typeface="Inter"/>
+                <a:latin typeface="Space Grotesk"/>
               </a:defRPr>
             </a:pPr>
             <a:r>
@@ -7217,7 +7217,7 @@
             <a:avLst/>
           </a:prstGeom>
           <a:solidFill>
-            <a:srgbClr val="F3F2E8"/>
+            <a:srgbClr val="F5F5F3"/>
           </a:solidFill>
           <a:ln>
             <a:noFill/>
@@ -7314,7 +7314,7 @@
                 <a:solidFill>
                   <a:srgbClr val="6B6B6B"/>
                 </a:solidFill>
-                <a:latin typeface="Inter"/>
+                <a:latin typeface="Space Grotesk"/>
               </a:defRPr>
             </a:pPr>
             <a:r>
@@ -7353,7 +7353,7 @@
                 <a:solidFill>
                   <a:srgbClr val="131314"/>
                 </a:solidFill>
-                <a:latin typeface="Inter"/>
+                <a:latin typeface="Space Grotesk"/>
               </a:defRPr>
             </a:pPr>
             <a:r>
@@ -7377,7 +7377,7 @@
             <a:avLst/>
           </a:prstGeom>
           <a:solidFill>
-            <a:srgbClr val="E8E7DD"/>
+            <a:srgbClr val="E8E8E6"/>
           </a:solidFill>
           <a:ln>
             <a:noFill/>
@@ -7435,7 +7435,7 @@
                 <a:solidFill>
                   <a:srgbClr val="6B6B6B"/>
                 </a:solidFill>
-                <a:latin typeface="Inter"/>
+                <a:latin typeface="Space Grotesk"/>
               </a:defRPr>
             </a:pPr>
             <a:r>
@@ -7482,7 +7482,7 @@
                 <a:solidFill>
                   <a:srgbClr val="131314"/>
                 </a:solidFill>
-                <a:latin typeface="Inter"/>
+                <a:latin typeface="Space Grotesk"/>
               </a:defRPr>
             </a:pPr>
             <a:r>
@@ -7506,7 +7506,7 @@
             <a:avLst/>
           </a:prstGeom>
           <a:solidFill>
-            <a:srgbClr val="E8E7DD"/>
+            <a:srgbClr val="E8E8E6"/>
           </a:solidFill>
           <a:ln>
             <a:noFill/>
@@ -7564,7 +7564,7 @@
                 <a:solidFill>
                   <a:srgbClr val="6B6B6B"/>
                 </a:solidFill>
-                <a:latin typeface="Inter"/>
+                <a:latin typeface="Space Grotesk"/>
               </a:defRPr>
             </a:pPr>
             <a:r>
@@ -7611,7 +7611,7 @@
                 <a:solidFill>
                   <a:srgbClr val="131314"/>
                 </a:solidFill>
-                <a:latin typeface="Inter"/>
+                <a:latin typeface="Space Grotesk"/>
               </a:defRPr>
             </a:pPr>
             <a:r>
@@ -7635,7 +7635,7 @@
             <a:avLst/>
           </a:prstGeom>
           <a:solidFill>
-            <a:srgbClr val="E8E7DD"/>
+            <a:srgbClr val="E8E8E6"/>
           </a:solidFill>
           <a:ln>
             <a:noFill/>
@@ -7693,7 +7693,7 @@
                 <a:solidFill>
                   <a:srgbClr val="6B6B6B"/>
                 </a:solidFill>
-                <a:latin typeface="Inter"/>
+                <a:latin typeface="Space Grotesk"/>
               </a:defRPr>
             </a:pPr>
             <a:r>
@@ -7807,7 +7807,7 @@
             <a:avLst/>
           </a:prstGeom>
           <a:solidFill>
-            <a:srgbClr val="F5EBE4"/>
+            <a:srgbClr val="F8F0EB"/>
           </a:solidFill>
           <a:ln>
             <a:noFill/>
@@ -7904,7 +7904,7 @@
                 <a:solidFill>
                   <a:srgbClr val="6B6B6B"/>
                 </a:solidFill>
-                <a:latin typeface="Inter"/>
+                <a:latin typeface="Space Grotesk"/>
               </a:defRPr>
             </a:pPr>
             <a:r>
@@ -7943,7 +7943,7 @@
                 <a:solidFill>
                   <a:srgbClr val="131314"/>
                 </a:solidFill>
-                <a:latin typeface="Inter"/>
+                <a:latin typeface="Space Grotesk"/>
               </a:defRPr>
             </a:pPr>
             <a:r>
@@ -7967,7 +7967,7 @@
             <a:avLst/>
           </a:prstGeom>
           <a:solidFill>
-            <a:srgbClr val="E8E7DD"/>
+            <a:srgbClr val="E8E8E6"/>
           </a:solidFill>
           <a:ln>
             <a:noFill/>
@@ -8025,7 +8025,7 @@
                 <a:solidFill>
                   <a:srgbClr val="6B6B6B"/>
                 </a:solidFill>
-                <a:latin typeface="Inter"/>
+                <a:latin typeface="Space Grotesk"/>
               </a:defRPr>
             </a:pPr>
             <a:r>
@@ -8072,7 +8072,7 @@
                 <a:solidFill>
                   <a:srgbClr val="131314"/>
                 </a:solidFill>
-                <a:latin typeface="Inter"/>
+                <a:latin typeface="Space Grotesk"/>
               </a:defRPr>
             </a:pPr>
             <a:r>
@@ -8096,7 +8096,7 @@
             <a:avLst/>
           </a:prstGeom>
           <a:solidFill>
-            <a:srgbClr val="E8E7DD"/>
+            <a:srgbClr val="E8E8E6"/>
           </a:solidFill>
           <a:ln>
             <a:noFill/>
@@ -8154,7 +8154,7 @@
                 <a:solidFill>
                   <a:srgbClr val="6B6B6B"/>
                 </a:solidFill>
-                <a:latin typeface="Inter"/>
+                <a:latin typeface="Space Grotesk"/>
               </a:defRPr>
             </a:pPr>
             <a:r>
@@ -8201,7 +8201,7 @@
                 <a:solidFill>
                   <a:srgbClr val="131314"/>
                 </a:solidFill>
-                <a:latin typeface="Inter"/>
+                <a:latin typeface="Space Grotesk"/>
               </a:defRPr>
             </a:pPr>
             <a:r>
@@ -8225,7 +8225,7 @@
             <a:avLst/>
           </a:prstGeom>
           <a:solidFill>
-            <a:srgbClr val="E8E7DD"/>
+            <a:srgbClr val="E8E8E6"/>
           </a:solidFill>
           <a:ln>
             <a:noFill/>
@@ -8283,7 +8283,7 @@
                 <a:solidFill>
                   <a:srgbClr val="6B6B6B"/>
                 </a:solidFill>
-                <a:latin typeface="Inter"/>
+                <a:latin typeface="Space Grotesk"/>
               </a:defRPr>
             </a:pPr>
             <a:r>
@@ -8401,7 +8401,7 @@
             <a:avLst/>
           </a:prstGeom>
           <a:solidFill>
-            <a:srgbClr val="F3F2E8"/>
+            <a:srgbClr val="F5F5F3"/>
           </a:solidFill>
           <a:ln>
             <a:noFill/>
@@ -8498,7 +8498,7 @@
                 <a:solidFill>
                   <a:srgbClr val="6B6B6B"/>
                 </a:solidFill>
-                <a:latin typeface="Inter"/>
+                <a:latin typeface="Space Grotesk"/>
               </a:defRPr>
             </a:pPr>
             <a:r>
@@ -8537,7 +8537,7 @@
                 <a:solidFill>
                   <a:srgbClr val="131314"/>
                 </a:solidFill>
-                <a:latin typeface="Inter"/>
+                <a:latin typeface="Space Grotesk"/>
               </a:defRPr>
             </a:pPr>
             <a:r>
@@ -8561,7 +8561,7 @@
             <a:avLst/>
           </a:prstGeom>
           <a:solidFill>
-            <a:srgbClr val="E8E7DD"/>
+            <a:srgbClr val="E8E8E6"/>
           </a:solidFill>
           <a:ln>
             <a:noFill/>
@@ -8619,7 +8619,7 @@
                 <a:solidFill>
                   <a:srgbClr val="6B6B6B"/>
                 </a:solidFill>
-                <a:latin typeface="Inter"/>
+                <a:latin typeface="Space Grotesk"/>
               </a:defRPr>
             </a:pPr>
             <a:r>
@@ -8666,7 +8666,7 @@
                 <a:solidFill>
                   <a:srgbClr val="131314"/>
                 </a:solidFill>
-                <a:latin typeface="Inter"/>
+                <a:latin typeface="Space Grotesk"/>
               </a:defRPr>
             </a:pPr>
             <a:r>
@@ -8690,7 +8690,7 @@
             <a:avLst/>
           </a:prstGeom>
           <a:solidFill>
-            <a:srgbClr val="E8E7DD"/>
+            <a:srgbClr val="E8E8E6"/>
           </a:solidFill>
           <a:ln>
             <a:noFill/>
@@ -8748,7 +8748,7 @@
                 <a:solidFill>
                   <a:srgbClr val="6B6B6B"/>
                 </a:solidFill>
-                <a:latin typeface="Inter"/>
+                <a:latin typeface="Space Grotesk"/>
               </a:defRPr>
             </a:pPr>
             <a:r>
@@ -8795,7 +8795,7 @@
                 <a:solidFill>
                   <a:srgbClr val="131314"/>
                 </a:solidFill>
-                <a:latin typeface="Inter"/>
+                <a:latin typeface="Space Grotesk"/>
               </a:defRPr>
             </a:pPr>
             <a:r>
@@ -8819,7 +8819,7 @@
             <a:avLst/>
           </a:prstGeom>
           <a:solidFill>
-            <a:srgbClr val="E8E7DD"/>
+            <a:srgbClr val="E8E8E6"/>
           </a:solidFill>
           <a:ln>
             <a:noFill/>
@@ -8877,7 +8877,7 @@
                 <a:solidFill>
                   <a:srgbClr val="6B6B6B"/>
                 </a:solidFill>
-                <a:latin typeface="Inter"/>
+                <a:latin typeface="Space Grotesk"/>
               </a:defRPr>
             </a:pPr>
             <a:r>
@@ -8967,7 +8967,7 @@
                 <a:solidFill>
                   <a:srgbClr val="FAF9F0"/>
                 </a:solidFill>
-                <a:latin typeface="Inter"/>
+                <a:latin typeface="Space Grotesk"/>
               </a:defRPr>
             </a:pPr>
             <a:r>
@@ -9068,7 +9068,7 @@
     <p:bg>
       <p:bgPr>
         <a:solidFill>
-          <a:srgbClr val="FAF9F0"/>
+          <a:srgbClr val="FFFFFF"/>
         </a:solidFill>
         <a:effectLst/>
       </p:bgPr>
@@ -9149,7 +9149,7 @@
                 <a:solidFill>
                   <a:srgbClr val="131314"/>
                 </a:solidFill>
-                <a:latin typeface="Inter"/>
+                <a:latin typeface="Space Grotesk"/>
               </a:defRPr>
             </a:pPr>
             <a:r>
@@ -9231,7 +9231,7 @@
                 <a:solidFill>
                   <a:srgbClr val="6B6B6B"/>
                 </a:solidFill>
-                <a:latin typeface="Inter"/>
+                <a:latin typeface="Space Grotesk"/>
               </a:defRPr>
             </a:pPr>
             <a:r>
@@ -9356,7 +9356,7 @@
                 <a:solidFill>
                   <a:srgbClr val="D97757"/>
                 </a:solidFill>
-                <a:latin typeface="Inter"/>
+                <a:latin typeface="Space Grotesk"/>
               </a:defRPr>
             </a:pPr>
             <a:r>
@@ -9395,7 +9395,7 @@
                 <a:solidFill>
                   <a:srgbClr val="131314"/>
                 </a:solidFill>
-                <a:latin typeface="Inter"/>
+                <a:latin typeface="Space Grotesk"/>
               </a:defRPr>
             </a:pPr>
             <a:r>
@@ -9419,7 +9419,7 @@
             <a:avLst/>
           </a:prstGeom>
           <a:solidFill>
-            <a:srgbClr val="E8E7DD"/>
+            <a:srgbClr val="E8E8E6"/>
           </a:solidFill>
           <a:ln>
             <a:noFill/>
@@ -9477,7 +9477,7 @@
                 <a:solidFill>
                   <a:srgbClr val="6B6B6B"/>
                 </a:solidFill>
-                <a:latin typeface="Inter"/>
+                <a:latin typeface="Space Grotesk"/>
               </a:defRPr>
             </a:pPr>
             <a:r>
@@ -9516,7 +9516,7 @@
                 <a:solidFill>
                   <a:srgbClr val="2A2A2A"/>
                 </a:solidFill>
-                <a:latin typeface="Inter"/>
+                <a:latin typeface="Space Grotesk"/>
               </a:defRPr>
             </a:pPr>
             <a:r>
@@ -9555,7 +9555,7 @@
                 <a:solidFill>
                   <a:srgbClr val="2A2A2A"/>
                 </a:solidFill>
-                <a:latin typeface="Inter"/>
+                <a:latin typeface="Space Grotesk"/>
               </a:defRPr>
             </a:pPr>
             <a:r>
@@ -9594,7 +9594,7 @@
                 <a:solidFill>
                   <a:srgbClr val="2A2A2A"/>
                 </a:solidFill>
-                <a:latin typeface="Inter"/>
+                <a:latin typeface="Space Grotesk"/>
               </a:defRPr>
             </a:pPr>
             <a:r>
@@ -9618,7 +9618,7 @@
             <a:avLst/>
           </a:prstGeom>
           <a:solidFill>
-            <a:srgbClr val="F5EBE4"/>
+            <a:srgbClr val="F8F0EB"/>
           </a:solidFill>
           <a:ln>
             <a:noFill/>
@@ -9676,7 +9676,7 @@
                 <a:solidFill>
                   <a:srgbClr val="D97757"/>
                 </a:solidFill>
-                <a:latin typeface="Inter"/>
+                <a:latin typeface="Space Grotesk"/>
               </a:defRPr>
             </a:pPr>
             <a:r>
@@ -9801,7 +9801,7 @@
                 <a:solidFill>
                   <a:srgbClr val="D97757"/>
                 </a:solidFill>
-                <a:latin typeface="Inter"/>
+                <a:latin typeface="Space Grotesk"/>
               </a:defRPr>
             </a:pPr>
             <a:r>
@@ -9840,7 +9840,7 @@
                 <a:solidFill>
                   <a:srgbClr val="131314"/>
                 </a:solidFill>
-                <a:latin typeface="Inter"/>
+                <a:latin typeface="Space Grotesk"/>
               </a:defRPr>
             </a:pPr>
             <a:r>
@@ -9864,7 +9864,7 @@
             <a:avLst/>
           </a:prstGeom>
           <a:solidFill>
-            <a:srgbClr val="E8E7DD"/>
+            <a:srgbClr val="E8E8E6"/>
           </a:solidFill>
           <a:ln>
             <a:noFill/>
@@ -9922,7 +9922,7 @@
                 <a:solidFill>
                   <a:srgbClr val="6B6B6B"/>
                 </a:solidFill>
-                <a:latin typeface="Inter"/>
+                <a:latin typeface="Space Grotesk"/>
               </a:defRPr>
             </a:pPr>
             <a:r>
@@ -9961,7 +9961,7 @@
                 <a:solidFill>
                   <a:srgbClr val="2A2A2A"/>
                 </a:solidFill>
-                <a:latin typeface="Inter"/>
+                <a:latin typeface="Space Grotesk"/>
               </a:defRPr>
             </a:pPr>
             <a:r>
@@ -10000,7 +10000,7 @@
                 <a:solidFill>
                   <a:srgbClr val="2A2A2A"/>
                 </a:solidFill>
-                <a:latin typeface="Inter"/>
+                <a:latin typeface="Space Grotesk"/>
               </a:defRPr>
             </a:pPr>
             <a:r>
@@ -10039,7 +10039,7 @@
                 <a:solidFill>
                   <a:srgbClr val="2A2A2A"/>
                 </a:solidFill>
-                <a:latin typeface="Inter"/>
+                <a:latin typeface="Space Grotesk"/>
               </a:defRPr>
             </a:pPr>
             <a:r>
@@ -10063,7 +10063,7 @@
             <a:avLst/>
           </a:prstGeom>
           <a:solidFill>
-            <a:srgbClr val="F5EBE4"/>
+            <a:srgbClr val="F8F0EB"/>
           </a:solidFill>
           <a:ln>
             <a:noFill/>
@@ -10121,7 +10121,7 @@
                 <a:solidFill>
                   <a:srgbClr val="D97757"/>
                 </a:solidFill>
-                <a:latin typeface="Inter"/>
+                <a:latin typeface="Space Grotesk"/>
               </a:defRPr>
             </a:pPr>
             <a:r>
@@ -10246,7 +10246,7 @@
                 <a:solidFill>
                   <a:srgbClr val="D97757"/>
                 </a:solidFill>
-                <a:latin typeface="Inter"/>
+                <a:latin typeface="Space Grotesk"/>
               </a:defRPr>
             </a:pPr>
             <a:r>
@@ -10285,7 +10285,7 @@
                 <a:solidFill>
                   <a:srgbClr val="131314"/>
                 </a:solidFill>
-                <a:latin typeface="Inter"/>
+                <a:latin typeface="Space Grotesk"/>
               </a:defRPr>
             </a:pPr>
             <a:r>
@@ -10309,7 +10309,7 @@
             <a:avLst/>
           </a:prstGeom>
           <a:solidFill>
-            <a:srgbClr val="E8E7DD"/>
+            <a:srgbClr val="E8E8E6"/>
           </a:solidFill>
           <a:ln>
             <a:noFill/>
@@ -10367,7 +10367,7 @@
                 <a:solidFill>
                   <a:srgbClr val="6B6B6B"/>
                 </a:solidFill>
-                <a:latin typeface="Inter"/>
+                <a:latin typeface="Space Grotesk"/>
               </a:defRPr>
             </a:pPr>
             <a:r>
@@ -10406,7 +10406,7 @@
                 <a:solidFill>
                   <a:srgbClr val="2A2A2A"/>
                 </a:solidFill>
-                <a:latin typeface="Inter"/>
+                <a:latin typeface="Space Grotesk"/>
               </a:defRPr>
             </a:pPr>
             <a:r>
@@ -10445,7 +10445,7 @@
                 <a:solidFill>
                   <a:srgbClr val="2A2A2A"/>
                 </a:solidFill>
-                <a:latin typeface="Inter"/>
+                <a:latin typeface="Space Grotesk"/>
               </a:defRPr>
             </a:pPr>
             <a:r>
@@ -10484,7 +10484,7 @@
                 <a:solidFill>
                   <a:srgbClr val="2A2A2A"/>
                 </a:solidFill>
-                <a:latin typeface="Inter"/>
+                <a:latin typeface="Space Grotesk"/>
               </a:defRPr>
             </a:pPr>
             <a:r>
@@ -10508,7 +10508,7 @@
             <a:avLst/>
           </a:prstGeom>
           <a:solidFill>
-            <a:srgbClr val="F5EBE4"/>
+            <a:srgbClr val="F8F0EB"/>
           </a:solidFill>
           <a:ln>
             <a:noFill/>
@@ -10566,7 +10566,7 @@
                 <a:solidFill>
                   <a:srgbClr val="D97757"/>
                 </a:solidFill>
-                <a:latin typeface="Inter"/>
+                <a:latin typeface="Space Grotesk"/>
               </a:defRPr>
             </a:pPr>
             <a:r>
@@ -10691,7 +10691,7 @@
                 <a:solidFill>
                   <a:srgbClr val="D97757"/>
                 </a:solidFill>
-                <a:latin typeface="Inter"/>
+                <a:latin typeface="Space Grotesk"/>
               </a:defRPr>
             </a:pPr>
             <a:r>
@@ -10730,7 +10730,7 @@
                 <a:solidFill>
                   <a:srgbClr val="131314"/>
                 </a:solidFill>
-                <a:latin typeface="Inter"/>
+                <a:latin typeface="Space Grotesk"/>
               </a:defRPr>
             </a:pPr>
             <a:r>
@@ -10754,7 +10754,7 @@
             <a:avLst/>
           </a:prstGeom>
           <a:solidFill>
-            <a:srgbClr val="E8E7DD"/>
+            <a:srgbClr val="E8E8E6"/>
           </a:solidFill>
           <a:ln>
             <a:noFill/>
@@ -10812,7 +10812,7 @@
                 <a:solidFill>
                   <a:srgbClr val="6B6B6B"/>
                 </a:solidFill>
-                <a:latin typeface="Inter"/>
+                <a:latin typeface="Space Grotesk"/>
               </a:defRPr>
             </a:pPr>
             <a:r>
@@ -10851,7 +10851,7 @@
                 <a:solidFill>
                   <a:srgbClr val="2A2A2A"/>
                 </a:solidFill>
-                <a:latin typeface="Inter"/>
+                <a:latin typeface="Space Grotesk"/>
               </a:defRPr>
             </a:pPr>
             <a:r>
@@ -10890,7 +10890,7 @@
                 <a:solidFill>
                   <a:srgbClr val="2A2A2A"/>
                 </a:solidFill>
-                <a:latin typeface="Inter"/>
+                <a:latin typeface="Space Grotesk"/>
               </a:defRPr>
             </a:pPr>
             <a:r>
@@ -10929,7 +10929,7 @@
                 <a:solidFill>
                   <a:srgbClr val="2A2A2A"/>
                 </a:solidFill>
-                <a:latin typeface="Inter"/>
+                <a:latin typeface="Space Grotesk"/>
               </a:defRPr>
             </a:pPr>
             <a:r>
@@ -10953,7 +10953,7 @@
             <a:avLst/>
           </a:prstGeom>
           <a:solidFill>
-            <a:srgbClr val="F5EBE4"/>
+            <a:srgbClr val="F8F0EB"/>
           </a:solidFill>
           <a:ln>
             <a:noFill/>
@@ -11011,7 +11011,7 @@
                 <a:solidFill>
                   <a:srgbClr val="D97757"/>
                 </a:solidFill>
-                <a:latin typeface="Inter"/>
+                <a:latin typeface="Space Grotesk"/>
               </a:defRPr>
             </a:pPr>
             <a:r>
@@ -11112,7 +11112,7 @@
     <p:bg>
       <p:bgPr>
         <a:solidFill>
-          <a:srgbClr val="FAF9F0"/>
+          <a:srgbClr val="FFFFFF"/>
         </a:solidFill>
         <a:effectLst/>
       </p:bgPr>
@@ -11193,7 +11193,7 @@
                 <a:solidFill>
                   <a:srgbClr val="131314"/>
                 </a:solidFill>
-                <a:latin typeface="Inter"/>
+                <a:latin typeface="Space Grotesk"/>
               </a:defRPr>
             </a:pPr>
             <a:r>
@@ -11275,7 +11275,7 @@
                 <a:solidFill>
                   <a:srgbClr val="6B6B6B"/>
                 </a:solidFill>
-                <a:latin typeface="Inter"/>
+                <a:latin typeface="Space Grotesk"/>
               </a:defRPr>
             </a:pPr>
             <a:r>
@@ -11299,7 +11299,7 @@
             <a:avLst/>
           </a:prstGeom>
           <a:solidFill>
-            <a:srgbClr val="F5EBE4"/>
+            <a:srgbClr val="F8F0EB"/>
           </a:solidFill>
           <a:ln>
             <a:noFill/>
@@ -11381,7 +11381,7 @@
             <a:avLst/>
           </a:prstGeom>
           <a:solidFill>
-            <a:srgbClr val="F3F2E8"/>
+            <a:srgbClr val="F5F5F3"/>
           </a:solidFill>
           <a:ln>
             <a:noFill/>
@@ -11439,7 +11439,7 @@
                 <a:solidFill>
                   <a:srgbClr val="131314"/>
                 </a:solidFill>
-                <a:latin typeface="Inter"/>
+                <a:latin typeface="Space Grotesk"/>
               </a:defRPr>
             </a:pPr>
             <a:r>
@@ -11478,7 +11478,7 @@
                 <a:solidFill>
                   <a:srgbClr val="6B6B6B"/>
                 </a:solidFill>
-                <a:latin typeface="Inter"/>
+                <a:latin typeface="Space Grotesk"/>
               </a:defRPr>
             </a:pPr>
             <a:r>
@@ -11510,7 +11510,7 @@
             <a:avLst/>
           </a:prstGeom>
           <a:solidFill>
-            <a:srgbClr val="F3F2E8"/>
+            <a:srgbClr val="F5F5F3"/>
           </a:solidFill>
           <a:ln>
             <a:noFill/>
@@ -11568,7 +11568,7 @@
                 <a:solidFill>
                   <a:srgbClr val="131314"/>
                 </a:solidFill>
-                <a:latin typeface="Inter"/>
+                <a:latin typeface="Space Grotesk"/>
               </a:defRPr>
             </a:pPr>
             <a:r>
@@ -11607,7 +11607,7 @@
                 <a:solidFill>
                   <a:srgbClr val="6B6B6B"/>
                 </a:solidFill>
-                <a:latin typeface="Inter"/>
+                <a:latin typeface="Space Grotesk"/>
               </a:defRPr>
             </a:pPr>
             <a:r>
@@ -11639,7 +11639,7 @@
             <a:avLst/>
           </a:prstGeom>
           <a:solidFill>
-            <a:srgbClr val="F3F2E8"/>
+            <a:srgbClr val="F5F5F3"/>
           </a:solidFill>
           <a:ln>
             <a:noFill/>
@@ -11697,7 +11697,7 @@
                 <a:solidFill>
                   <a:srgbClr val="131314"/>
                 </a:solidFill>
-                <a:latin typeface="Inter"/>
+                <a:latin typeface="Space Grotesk"/>
               </a:defRPr>
             </a:pPr>
             <a:r>
@@ -11736,7 +11736,7 @@
                 <a:solidFill>
                   <a:srgbClr val="6B6B6B"/>
                 </a:solidFill>
-                <a:latin typeface="Inter"/>
+                <a:latin typeface="Space Grotesk"/>
               </a:defRPr>
             </a:pPr>
             <a:r>
@@ -11768,7 +11768,7 @@
             <a:avLst/>
           </a:prstGeom>
           <a:solidFill>
-            <a:srgbClr val="F5EBE4"/>
+            <a:srgbClr val="F8F0EB"/>
           </a:solidFill>
           <a:ln>
             <a:noFill/>
@@ -11850,7 +11850,7 @@
             <a:avLst/>
           </a:prstGeom>
           <a:solidFill>
-            <a:srgbClr val="F3F2E8"/>
+            <a:srgbClr val="F5F5F3"/>
           </a:solidFill>
           <a:ln>
             <a:noFill/>
@@ -11908,7 +11908,7 @@
                 <a:solidFill>
                   <a:srgbClr val="131314"/>
                 </a:solidFill>
-                <a:latin typeface="Inter"/>
+                <a:latin typeface="Space Grotesk"/>
               </a:defRPr>
             </a:pPr>
             <a:r>
@@ -11947,7 +11947,7 @@
                 <a:solidFill>
                   <a:srgbClr val="6B6B6B"/>
                 </a:solidFill>
-                <a:latin typeface="Inter"/>
+                <a:latin typeface="Space Grotesk"/>
               </a:defRPr>
             </a:pPr>
             <a:r>
@@ -11979,7 +11979,7 @@
             <a:avLst/>
           </a:prstGeom>
           <a:solidFill>
-            <a:srgbClr val="F3F2E8"/>
+            <a:srgbClr val="F5F5F3"/>
           </a:solidFill>
           <a:ln>
             <a:noFill/>
@@ -12037,7 +12037,7 @@
                 <a:solidFill>
                   <a:srgbClr val="131314"/>
                 </a:solidFill>
-                <a:latin typeface="Inter"/>
+                <a:latin typeface="Space Grotesk"/>
               </a:defRPr>
             </a:pPr>
             <a:r>
@@ -12076,7 +12076,7 @@
                 <a:solidFill>
                   <a:srgbClr val="6B6B6B"/>
                 </a:solidFill>
-                <a:latin typeface="Inter"/>
+                <a:latin typeface="Space Grotesk"/>
               </a:defRPr>
             </a:pPr>
             <a:r>
@@ -12108,7 +12108,7 @@
             <a:avLst/>
           </a:prstGeom>
           <a:solidFill>
-            <a:srgbClr val="F3F2E8"/>
+            <a:srgbClr val="F5F5F3"/>
           </a:solidFill>
           <a:ln>
             <a:noFill/>
@@ -12166,7 +12166,7 @@
                 <a:solidFill>
                   <a:srgbClr val="131314"/>
                 </a:solidFill>
-                <a:latin typeface="Inter"/>
+                <a:latin typeface="Space Grotesk"/>
               </a:defRPr>
             </a:pPr>
             <a:r>
@@ -12205,7 +12205,7 @@
                 <a:solidFill>
                   <a:srgbClr val="6B6B6B"/>
                 </a:solidFill>
-                <a:latin typeface="Inter"/>
+                <a:latin typeface="Space Grotesk"/>
               </a:defRPr>
             </a:pPr>
             <a:r>
@@ -12295,7 +12295,7 @@
                 <a:solidFill>
                   <a:srgbClr val="FFFFFF"/>
                 </a:solidFill>
-                <a:latin typeface="Inter"/>
+                <a:latin typeface="Space Grotesk"/>
               </a:defRPr>
             </a:pPr>
             <a:r>
@@ -12396,7 +12396,7 @@
     <p:bg>
       <p:bgPr>
         <a:solidFill>
-          <a:srgbClr val="FAF9F0"/>
+          <a:srgbClr val="FFFFFF"/>
         </a:solidFill>
         <a:effectLst/>
       </p:bgPr>
@@ -12477,7 +12477,7 @@
                 <a:solidFill>
                   <a:srgbClr val="131314"/>
                 </a:solidFill>
-                <a:latin typeface="Inter"/>
+                <a:latin typeface="Space Grotesk"/>
               </a:defRPr>
             </a:pPr>
             <a:r>
@@ -12559,7 +12559,7 @@
                 <a:solidFill>
                   <a:srgbClr val="6B6B6B"/>
                 </a:solidFill>
-                <a:latin typeface="Inter"/>
+                <a:latin typeface="Space Grotesk"/>
               </a:defRPr>
             </a:pPr>
             <a:r>
@@ -12583,7 +12583,7 @@
             <a:avLst/>
           </a:prstGeom>
           <a:solidFill>
-            <a:srgbClr val="F5EBE4"/>
+            <a:srgbClr val="F8F0EB"/>
           </a:solidFill>
           <a:ln>
             <a:noFill/>
@@ -12665,7 +12665,7 @@
             <a:avLst/>
           </a:prstGeom>
           <a:solidFill>
-            <a:srgbClr val="F3F2E8"/>
+            <a:srgbClr val="F5F5F3"/>
           </a:solidFill>
           <a:ln>
             <a:noFill/>
@@ -12723,7 +12723,7 @@
                 <a:solidFill>
                   <a:srgbClr val="131314"/>
                 </a:solidFill>
-                <a:latin typeface="Inter"/>
+                <a:latin typeface="Space Grotesk"/>
               </a:defRPr>
             </a:pPr>
             <a:r>
@@ -12762,7 +12762,7 @@
                 <a:solidFill>
                   <a:srgbClr val="6B6B6B"/>
                 </a:solidFill>
-                <a:latin typeface="Inter"/>
+                <a:latin typeface="Space Grotesk"/>
               </a:defRPr>
             </a:pPr>
             <a:r>
@@ -12794,7 +12794,7 @@
             <a:avLst/>
           </a:prstGeom>
           <a:solidFill>
-            <a:srgbClr val="F3F2E8"/>
+            <a:srgbClr val="F5F5F3"/>
           </a:solidFill>
           <a:ln>
             <a:noFill/>
@@ -12852,7 +12852,7 @@
                 <a:solidFill>
                   <a:srgbClr val="131314"/>
                 </a:solidFill>
-                <a:latin typeface="Inter"/>
+                <a:latin typeface="Space Grotesk"/>
               </a:defRPr>
             </a:pPr>
             <a:r>
@@ -12891,7 +12891,7 @@
                 <a:solidFill>
                   <a:srgbClr val="6B6B6B"/>
                 </a:solidFill>
-                <a:latin typeface="Inter"/>
+                <a:latin typeface="Space Grotesk"/>
               </a:defRPr>
             </a:pPr>
             <a:r>
@@ -12923,7 +12923,7 @@
             <a:avLst/>
           </a:prstGeom>
           <a:solidFill>
-            <a:srgbClr val="F3F2E8"/>
+            <a:srgbClr val="F5F5F3"/>
           </a:solidFill>
           <a:ln>
             <a:noFill/>
@@ -12981,7 +12981,7 @@
                 <a:solidFill>
                   <a:srgbClr val="131314"/>
                 </a:solidFill>
-                <a:latin typeface="Inter"/>
+                <a:latin typeface="Space Grotesk"/>
               </a:defRPr>
             </a:pPr>
             <a:r>
@@ -13020,7 +13020,7 @@
                 <a:solidFill>
                   <a:srgbClr val="6B6B6B"/>
                 </a:solidFill>
-                <a:latin typeface="Inter"/>
+                <a:latin typeface="Space Grotesk"/>
               </a:defRPr>
             </a:pPr>
             <a:r>
@@ -13052,7 +13052,7 @@
             <a:avLst/>
           </a:prstGeom>
           <a:solidFill>
-            <a:srgbClr val="F5EBE4"/>
+            <a:srgbClr val="F8F0EB"/>
           </a:solidFill>
           <a:ln>
             <a:noFill/>
@@ -13134,7 +13134,7 @@
             <a:avLst/>
           </a:prstGeom>
           <a:solidFill>
-            <a:srgbClr val="F3F2E8"/>
+            <a:srgbClr val="F5F5F3"/>
           </a:solidFill>
           <a:ln>
             <a:noFill/>
@@ -13192,7 +13192,7 @@
                 <a:solidFill>
                   <a:srgbClr val="131314"/>
                 </a:solidFill>
-                <a:latin typeface="Inter"/>
+                <a:latin typeface="Space Grotesk"/>
               </a:defRPr>
             </a:pPr>
             <a:r>
@@ -13231,7 +13231,7 @@
                 <a:solidFill>
                   <a:srgbClr val="6B6B6B"/>
                 </a:solidFill>
-                <a:latin typeface="Inter"/>
+                <a:latin typeface="Space Grotesk"/>
               </a:defRPr>
             </a:pPr>
             <a:r>
@@ -13263,7 +13263,7 @@
             <a:avLst/>
           </a:prstGeom>
           <a:solidFill>
-            <a:srgbClr val="F3F2E8"/>
+            <a:srgbClr val="F5F5F3"/>
           </a:solidFill>
           <a:ln>
             <a:noFill/>
@@ -13321,7 +13321,7 @@
                 <a:solidFill>
                   <a:srgbClr val="131314"/>
                 </a:solidFill>
-                <a:latin typeface="Inter"/>
+                <a:latin typeface="Space Grotesk"/>
               </a:defRPr>
             </a:pPr>
             <a:r>
@@ -13360,7 +13360,7 @@
                 <a:solidFill>
                   <a:srgbClr val="6B6B6B"/>
                 </a:solidFill>
-                <a:latin typeface="Inter"/>
+                <a:latin typeface="Space Grotesk"/>
               </a:defRPr>
             </a:pPr>
             <a:r>
@@ -13392,7 +13392,7 @@
             <a:avLst/>
           </a:prstGeom>
           <a:solidFill>
-            <a:srgbClr val="F3F2E8"/>
+            <a:srgbClr val="F5F5F3"/>
           </a:solidFill>
           <a:ln>
             <a:noFill/>
@@ -13450,7 +13450,7 @@
                 <a:solidFill>
                   <a:srgbClr val="131314"/>
                 </a:solidFill>
-                <a:latin typeface="Inter"/>
+                <a:latin typeface="Space Grotesk"/>
               </a:defRPr>
             </a:pPr>
             <a:r>
@@ -13489,7 +13489,7 @@
                 <a:solidFill>
                   <a:srgbClr val="6B6B6B"/>
                 </a:solidFill>
-                <a:latin typeface="Inter"/>
+                <a:latin typeface="Space Grotesk"/>
               </a:defRPr>
             </a:pPr>
             <a:r>
@@ -13579,7 +13579,7 @@
                 <a:solidFill>
                   <a:srgbClr val="FFFFFF"/>
                 </a:solidFill>
-                <a:latin typeface="Inter"/>
+                <a:latin typeface="Space Grotesk"/>
               </a:defRPr>
             </a:pPr>
             <a:r>
@@ -13680,7 +13680,7 @@
     <p:bg>
       <p:bgPr>
         <a:solidFill>
-          <a:srgbClr val="FAF9F0"/>
+          <a:srgbClr val="FFFFFF"/>
         </a:solidFill>
         <a:effectLst/>
       </p:bgPr>
@@ -13761,7 +13761,7 @@
                 <a:solidFill>
                   <a:srgbClr val="131314"/>
                 </a:solidFill>
-                <a:latin typeface="Inter"/>
+                <a:latin typeface="Space Grotesk"/>
               </a:defRPr>
             </a:pPr>
             <a:r>
@@ -13843,7 +13843,7 @@
                 <a:solidFill>
                   <a:srgbClr val="6B6B6B"/>
                 </a:solidFill>
-                <a:latin typeface="Inter"/>
+                <a:latin typeface="Space Grotesk"/>
               </a:defRPr>
             </a:pPr>
             <a:r>
@@ -13867,7 +13867,7 @@
             <a:avLst/>
           </a:prstGeom>
           <a:solidFill>
-            <a:srgbClr val="F5EBE4"/>
+            <a:srgbClr val="F8F0EB"/>
           </a:solidFill>
           <a:ln>
             <a:noFill/>
@@ -13949,7 +13949,7 @@
             <a:avLst/>
           </a:prstGeom>
           <a:solidFill>
-            <a:srgbClr val="F3F2E8"/>
+            <a:srgbClr val="F5F5F3"/>
           </a:solidFill>
           <a:ln>
             <a:noFill/>
@@ -14007,7 +14007,7 @@
                 <a:solidFill>
                   <a:srgbClr val="131314"/>
                 </a:solidFill>
-                <a:latin typeface="Inter"/>
+                <a:latin typeface="Space Grotesk"/>
               </a:defRPr>
             </a:pPr>
             <a:r>
@@ -14046,7 +14046,7 @@
                 <a:solidFill>
                   <a:srgbClr val="6B6B6B"/>
                 </a:solidFill>
-                <a:latin typeface="Inter"/>
+                <a:latin typeface="Space Grotesk"/>
               </a:defRPr>
             </a:pPr>
             <a:r>
@@ -14078,7 +14078,7 @@
             <a:avLst/>
           </a:prstGeom>
           <a:solidFill>
-            <a:srgbClr val="F3F2E8"/>
+            <a:srgbClr val="F5F5F3"/>
           </a:solidFill>
           <a:ln>
             <a:noFill/>
@@ -14136,7 +14136,7 @@
                 <a:solidFill>
                   <a:srgbClr val="131314"/>
                 </a:solidFill>
-                <a:latin typeface="Inter"/>
+                <a:latin typeface="Space Grotesk"/>
               </a:defRPr>
             </a:pPr>
             <a:r>
@@ -14175,7 +14175,7 @@
                 <a:solidFill>
                   <a:srgbClr val="6B6B6B"/>
                 </a:solidFill>
-                <a:latin typeface="Inter"/>
+                <a:latin typeface="Space Grotesk"/>
               </a:defRPr>
             </a:pPr>
             <a:r>
@@ -14207,7 +14207,7 @@
             <a:avLst/>
           </a:prstGeom>
           <a:solidFill>
-            <a:srgbClr val="F3F2E8"/>
+            <a:srgbClr val="F5F5F3"/>
           </a:solidFill>
           <a:ln>
             <a:noFill/>
@@ -14265,7 +14265,7 @@
                 <a:solidFill>
                   <a:srgbClr val="131314"/>
                 </a:solidFill>
-                <a:latin typeface="Inter"/>
+                <a:latin typeface="Space Grotesk"/>
               </a:defRPr>
             </a:pPr>
             <a:r>
@@ -14304,7 +14304,7 @@
                 <a:solidFill>
                   <a:srgbClr val="6B6B6B"/>
                 </a:solidFill>
-                <a:latin typeface="Inter"/>
+                <a:latin typeface="Space Grotesk"/>
               </a:defRPr>
             </a:pPr>
             <a:r>
@@ -14336,7 +14336,7 @@
             <a:avLst/>
           </a:prstGeom>
           <a:solidFill>
-            <a:srgbClr val="F5EBE4"/>
+            <a:srgbClr val="F8F0EB"/>
           </a:solidFill>
           <a:ln>
             <a:noFill/>
@@ -14418,7 +14418,7 @@
             <a:avLst/>
           </a:prstGeom>
           <a:solidFill>
-            <a:srgbClr val="F3F2E8"/>
+            <a:srgbClr val="F5F5F3"/>
           </a:solidFill>
           <a:ln>
             <a:noFill/>
@@ -14476,7 +14476,7 @@
                 <a:solidFill>
                   <a:srgbClr val="131314"/>
                 </a:solidFill>
-                <a:latin typeface="Inter"/>
+                <a:latin typeface="Space Grotesk"/>
               </a:defRPr>
             </a:pPr>
             <a:r>
@@ -14515,7 +14515,7 @@
                 <a:solidFill>
                   <a:srgbClr val="6B6B6B"/>
                 </a:solidFill>
-                <a:latin typeface="Inter"/>
+                <a:latin typeface="Space Grotesk"/>
               </a:defRPr>
             </a:pPr>
             <a:r>
@@ -14547,7 +14547,7 @@
             <a:avLst/>
           </a:prstGeom>
           <a:solidFill>
-            <a:srgbClr val="F3F2E8"/>
+            <a:srgbClr val="F5F5F3"/>
           </a:solidFill>
           <a:ln>
             <a:noFill/>
@@ -14605,7 +14605,7 @@
                 <a:solidFill>
                   <a:srgbClr val="131314"/>
                 </a:solidFill>
-                <a:latin typeface="Inter"/>
+                <a:latin typeface="Space Grotesk"/>
               </a:defRPr>
             </a:pPr>
             <a:r>
@@ -14644,7 +14644,7 @@
                 <a:solidFill>
                   <a:srgbClr val="6B6B6B"/>
                 </a:solidFill>
-                <a:latin typeface="Inter"/>
+                <a:latin typeface="Space Grotesk"/>
               </a:defRPr>
             </a:pPr>
             <a:r>
@@ -14676,7 +14676,7 @@
             <a:avLst/>
           </a:prstGeom>
           <a:solidFill>
-            <a:srgbClr val="F3F2E8"/>
+            <a:srgbClr val="F5F5F3"/>
           </a:solidFill>
           <a:ln>
             <a:noFill/>
@@ -14734,7 +14734,7 @@
                 <a:solidFill>
                   <a:srgbClr val="131314"/>
                 </a:solidFill>
-                <a:latin typeface="Inter"/>
+                <a:latin typeface="Space Grotesk"/>
               </a:defRPr>
             </a:pPr>
             <a:r>
@@ -14773,7 +14773,7 @@
                 <a:solidFill>
                   <a:srgbClr val="6B6B6B"/>
                 </a:solidFill>
-                <a:latin typeface="Inter"/>
+                <a:latin typeface="Space Grotesk"/>
               </a:defRPr>
             </a:pPr>
             <a:r>
@@ -14863,7 +14863,7 @@
                 <a:solidFill>
                   <a:srgbClr val="FFFFFF"/>
                 </a:solidFill>
-                <a:latin typeface="Inter"/>
+                <a:latin typeface="Space Grotesk"/>
               </a:defRPr>
             </a:pPr>
             <a:r>
@@ -14964,7 +14964,7 @@
     <p:bg>
       <p:bgPr>
         <a:solidFill>
-          <a:srgbClr val="FAF9F0"/>
+          <a:srgbClr val="FFFFFF"/>
         </a:solidFill>
         <a:effectLst/>
       </p:bgPr>
@@ -15045,7 +15045,7 @@
                 <a:solidFill>
                   <a:srgbClr val="131314"/>
                 </a:solidFill>
-                <a:latin typeface="Inter"/>
+                <a:latin typeface="Space Grotesk"/>
               </a:defRPr>
             </a:pPr>
             <a:r>
@@ -15127,7 +15127,7 @@
                 <a:solidFill>
                   <a:srgbClr val="6B6B6B"/>
                 </a:solidFill>
-                <a:latin typeface="Inter"/>
+                <a:latin typeface="Space Grotesk"/>
               </a:defRPr>
             </a:pPr>
             <a:r>
@@ -15151,7 +15151,7 @@
             <a:avLst/>
           </a:prstGeom>
           <a:solidFill>
-            <a:srgbClr val="F5EBE4"/>
+            <a:srgbClr val="F8F0EB"/>
           </a:solidFill>
           <a:ln>
             <a:noFill/>
@@ -15233,7 +15233,7 @@
             <a:avLst/>
           </a:prstGeom>
           <a:solidFill>
-            <a:srgbClr val="F3F2E8"/>
+            <a:srgbClr val="F5F5F3"/>
           </a:solidFill>
           <a:ln>
             <a:noFill/>
@@ -15291,7 +15291,7 @@
                 <a:solidFill>
                   <a:srgbClr val="131314"/>
                 </a:solidFill>
-                <a:latin typeface="Inter"/>
+                <a:latin typeface="Space Grotesk"/>
               </a:defRPr>
             </a:pPr>
             <a:r>
@@ -15330,7 +15330,7 @@
                 <a:solidFill>
                   <a:srgbClr val="6B6B6B"/>
                 </a:solidFill>
-                <a:latin typeface="Inter"/>
+                <a:latin typeface="Space Grotesk"/>
               </a:defRPr>
             </a:pPr>
             <a:r>
@@ -15362,7 +15362,7 @@
             <a:avLst/>
           </a:prstGeom>
           <a:solidFill>
-            <a:srgbClr val="F3F2E8"/>
+            <a:srgbClr val="F5F5F3"/>
           </a:solidFill>
           <a:ln>
             <a:noFill/>
@@ -15420,7 +15420,7 @@
                 <a:solidFill>
                   <a:srgbClr val="131314"/>
                 </a:solidFill>
-                <a:latin typeface="Inter"/>
+                <a:latin typeface="Space Grotesk"/>
               </a:defRPr>
             </a:pPr>
             <a:r>
@@ -15459,7 +15459,7 @@
                 <a:solidFill>
                   <a:srgbClr val="6B6B6B"/>
                 </a:solidFill>
-                <a:latin typeface="Inter"/>
+                <a:latin typeface="Space Grotesk"/>
               </a:defRPr>
             </a:pPr>
             <a:r>
@@ -15491,7 +15491,7 @@
             <a:avLst/>
           </a:prstGeom>
           <a:solidFill>
-            <a:srgbClr val="F3F2E8"/>
+            <a:srgbClr val="F5F5F3"/>
           </a:solidFill>
           <a:ln>
             <a:noFill/>
@@ -15549,7 +15549,7 @@
                 <a:solidFill>
                   <a:srgbClr val="131314"/>
                 </a:solidFill>
-                <a:latin typeface="Inter"/>
+                <a:latin typeface="Space Grotesk"/>
               </a:defRPr>
             </a:pPr>
             <a:r>
@@ -15588,7 +15588,7 @@
                 <a:solidFill>
                   <a:srgbClr val="6B6B6B"/>
                 </a:solidFill>
-                <a:latin typeface="Inter"/>
+                <a:latin typeface="Space Grotesk"/>
               </a:defRPr>
             </a:pPr>
             <a:r>
@@ -15620,7 +15620,7 @@
             <a:avLst/>
           </a:prstGeom>
           <a:solidFill>
-            <a:srgbClr val="F5EBE4"/>
+            <a:srgbClr val="F8F0EB"/>
           </a:solidFill>
           <a:ln>
             <a:noFill/>
@@ -15702,7 +15702,7 @@
             <a:avLst/>
           </a:prstGeom>
           <a:solidFill>
-            <a:srgbClr val="F3F2E8"/>
+            <a:srgbClr val="F5F5F3"/>
           </a:solidFill>
           <a:ln>
             <a:noFill/>
@@ -15760,7 +15760,7 @@
                 <a:solidFill>
                   <a:srgbClr val="131314"/>
                 </a:solidFill>
-                <a:latin typeface="Inter"/>
+                <a:latin typeface="Space Grotesk"/>
               </a:defRPr>
             </a:pPr>
             <a:r>
@@ -15799,7 +15799,7 @@
                 <a:solidFill>
                   <a:srgbClr val="6B6B6B"/>
                 </a:solidFill>
-                <a:latin typeface="Inter"/>
+                <a:latin typeface="Space Grotesk"/>
               </a:defRPr>
             </a:pPr>
             <a:r>
@@ -15831,7 +15831,7 @@
             <a:avLst/>
           </a:prstGeom>
           <a:solidFill>
-            <a:srgbClr val="F3F2E8"/>
+            <a:srgbClr val="F5F5F3"/>
           </a:solidFill>
           <a:ln>
             <a:noFill/>
@@ -15889,7 +15889,7 @@
                 <a:solidFill>
                   <a:srgbClr val="131314"/>
                 </a:solidFill>
-                <a:latin typeface="Inter"/>
+                <a:latin typeface="Space Grotesk"/>
               </a:defRPr>
             </a:pPr>
             <a:r>
@@ -15928,7 +15928,7 @@
                 <a:solidFill>
                   <a:srgbClr val="6B6B6B"/>
                 </a:solidFill>
-                <a:latin typeface="Inter"/>
+                <a:latin typeface="Space Grotesk"/>
               </a:defRPr>
             </a:pPr>
             <a:r>
@@ -15960,7 +15960,7 @@
             <a:avLst/>
           </a:prstGeom>
           <a:solidFill>
-            <a:srgbClr val="F3F2E8"/>
+            <a:srgbClr val="F5F5F3"/>
           </a:solidFill>
           <a:ln>
             <a:noFill/>
@@ -16018,7 +16018,7 @@
                 <a:solidFill>
                   <a:srgbClr val="131314"/>
                 </a:solidFill>
-                <a:latin typeface="Inter"/>
+                <a:latin typeface="Space Grotesk"/>
               </a:defRPr>
             </a:pPr>
             <a:r>
@@ -16057,7 +16057,7 @@
                 <a:solidFill>
                   <a:srgbClr val="6B6B6B"/>
                 </a:solidFill>
-                <a:latin typeface="Inter"/>
+                <a:latin typeface="Space Grotesk"/>
               </a:defRPr>
             </a:pPr>
             <a:r>
@@ -16147,7 +16147,7 @@
                 <a:solidFill>
                   <a:srgbClr val="FFFFFF"/>
                 </a:solidFill>
-                <a:latin typeface="Inter"/>
+                <a:latin typeface="Space Grotesk"/>
               </a:defRPr>
             </a:pPr>
             <a:r>
@@ -16248,7 +16248,7 @@
     <p:bg>
       <p:bgPr>
         <a:solidFill>
-          <a:srgbClr val="FAF9F0"/>
+          <a:srgbClr val="FFFFFF"/>
         </a:solidFill>
         <a:effectLst/>
       </p:bgPr>
@@ -16329,7 +16329,7 @@
                 <a:solidFill>
                   <a:srgbClr val="131314"/>
                 </a:solidFill>
-                <a:latin typeface="Inter"/>
+                <a:latin typeface="Space Grotesk"/>
               </a:defRPr>
             </a:pPr>
             <a:r>
@@ -16411,7 +16411,7 @@
                 <a:solidFill>
                   <a:srgbClr val="6B6B6B"/>
                 </a:solidFill>
-                <a:latin typeface="Inter"/>
+                <a:latin typeface="Space Grotesk"/>
               </a:defRPr>
             </a:pPr>
             <a:r>
@@ -16575,7 +16575,7 @@
                 <a:solidFill>
                   <a:srgbClr val="2A2A2A"/>
                 </a:solidFill>
-                <a:latin typeface="Inter"/>
+                <a:latin typeface="Space Grotesk"/>
               </a:defRPr>
             </a:pPr>
             <a:r>
@@ -16614,7 +16614,7 @@
                 <a:solidFill>
                   <a:srgbClr val="2A2A2A"/>
                 </a:solidFill>
-                <a:latin typeface="Inter"/>
+                <a:latin typeface="Space Grotesk"/>
               </a:defRPr>
             </a:pPr>
             <a:r>
@@ -16653,7 +16653,7 @@
                 <a:solidFill>
                   <a:srgbClr val="2A2A2A"/>
                 </a:solidFill>
-                <a:latin typeface="Inter"/>
+                <a:latin typeface="Space Grotesk"/>
               </a:defRPr>
             </a:pPr>
             <a:r>
@@ -16817,7 +16817,7 @@
                 <a:solidFill>
                   <a:srgbClr val="2A2A2A"/>
                 </a:solidFill>
-                <a:latin typeface="Inter"/>
+                <a:latin typeface="Space Grotesk"/>
               </a:defRPr>
             </a:pPr>
             <a:r>
@@ -16856,7 +16856,7 @@
                 <a:solidFill>
                   <a:srgbClr val="2A2A2A"/>
                 </a:solidFill>
-                <a:latin typeface="Inter"/>
+                <a:latin typeface="Space Grotesk"/>
               </a:defRPr>
             </a:pPr>
             <a:r>
@@ -16895,7 +16895,7 @@
                 <a:solidFill>
                   <a:srgbClr val="2A2A2A"/>
                 </a:solidFill>
-                <a:latin typeface="Inter"/>
+                <a:latin typeface="Space Grotesk"/>
               </a:defRPr>
             </a:pPr>
             <a:r>
@@ -16934,7 +16934,7 @@
                 <a:solidFill>
                   <a:srgbClr val="2A2A2A"/>
                 </a:solidFill>
-                <a:latin typeface="Inter"/>
+                <a:latin typeface="Space Grotesk"/>
               </a:defRPr>
             </a:pPr>
             <a:r>
@@ -17059,7 +17059,7 @@
                 <a:solidFill>
                   <a:srgbClr val="D97757"/>
                 </a:solidFill>
-                <a:latin typeface="Inter"/>
+                <a:latin typeface="Space Grotesk"/>
               </a:defRPr>
             </a:pPr>
             <a:r>
@@ -17098,7 +17098,7 @@
                 <a:solidFill>
                   <a:srgbClr val="131314"/>
                 </a:solidFill>
-                <a:latin typeface="Inter"/>
+                <a:latin typeface="Space Grotesk"/>
               </a:defRPr>
             </a:pPr>
             <a:r>
@@ -17122,7 +17122,7 @@
             <a:avLst/>
           </a:prstGeom>
           <a:solidFill>
-            <a:srgbClr val="E8E7DD"/>
+            <a:srgbClr val="E8E8E6"/>
           </a:solidFill>
           <a:ln>
             <a:noFill/>
@@ -17180,7 +17180,7 @@
                 <a:solidFill>
                   <a:srgbClr val="6B6B6B"/>
                 </a:solidFill>
-                <a:latin typeface="Inter"/>
+                <a:latin typeface="Space Grotesk"/>
               </a:defRPr>
             </a:pPr>
             <a:r>
@@ -17361,7 +17361,7 @@
                 <a:solidFill>
                   <a:srgbClr val="D97757"/>
                 </a:solidFill>
-                <a:latin typeface="Inter"/>
+                <a:latin typeface="Space Grotesk"/>
               </a:defRPr>
             </a:pPr>
             <a:r>
@@ -17400,7 +17400,7 @@
                 <a:solidFill>
                   <a:srgbClr val="131314"/>
                 </a:solidFill>
-                <a:latin typeface="Inter"/>
+                <a:latin typeface="Space Grotesk"/>
               </a:defRPr>
             </a:pPr>
             <a:r>
@@ -17424,7 +17424,7 @@
             <a:avLst/>
           </a:prstGeom>
           <a:solidFill>
-            <a:srgbClr val="E8E7DD"/>
+            <a:srgbClr val="E8E8E6"/>
           </a:solidFill>
           <a:ln>
             <a:noFill/>
@@ -17482,7 +17482,7 @@
                 <a:solidFill>
                   <a:srgbClr val="6B6B6B"/>
                 </a:solidFill>
-                <a:latin typeface="Inter"/>
+                <a:latin typeface="Space Grotesk"/>
               </a:defRPr>
             </a:pPr>
             <a:r>
@@ -17663,7 +17663,7 @@
                 <a:solidFill>
                   <a:srgbClr val="D97757"/>
                 </a:solidFill>
-                <a:latin typeface="Inter"/>
+                <a:latin typeface="Space Grotesk"/>
               </a:defRPr>
             </a:pPr>
             <a:r>
@@ -17702,7 +17702,7 @@
                 <a:solidFill>
                   <a:srgbClr val="131314"/>
                 </a:solidFill>
-                <a:latin typeface="Inter"/>
+                <a:latin typeface="Space Grotesk"/>
               </a:defRPr>
             </a:pPr>
             <a:r>
@@ -17726,7 +17726,7 @@
             <a:avLst/>
           </a:prstGeom>
           <a:solidFill>
-            <a:srgbClr val="E8E7DD"/>
+            <a:srgbClr val="E8E8E6"/>
           </a:solidFill>
           <a:ln>
             <a:noFill/>
@@ -17784,7 +17784,7 @@
                 <a:solidFill>
                   <a:srgbClr val="6B6B6B"/>
                 </a:solidFill>
-                <a:latin typeface="Inter"/>
+                <a:latin typeface="Space Grotesk"/>
               </a:defRPr>
             </a:pPr>
             <a:r>

--- a/Salesteq-Raiffeisen-Scenario-Branded.pptx
+++ b/Salesteq-Raiffeisen-Scenario-Branded.pptx
@@ -5357,7 +5357,7 @@
               </a:defRPr>
             </a:pPr>
             <a:r>
-              <a:t>Raiffeisen investiert bereits in AI (Meeting-Vorbereitung, Chatbot Tina). Die Frage ist nicht ob,</a:t>
+              <a:t>AI verändert den Bankvertrieb. Raiffeisen setzt bereits erste Anwendungen ein (Meeting-Vorbereitung,</a:t>
             </a:r>
           </a:p>
           <a:p>
@@ -5368,7 +5368,7 @@
               <a:spcAft>
                 <a:spcPts val="200"/>
               </a:spcAft>
-              <a:defRPr sz="1200" b="1">
+              <a:defRPr sz="1200" b="0">
                 <a:solidFill>
                   <a:srgbClr val="2A2A2A"/>
                 </a:solidFill>
@@ -5376,24 +5376,8 @@
               </a:defRPr>
             </a:pPr>
             <a:r>
-              <a:t>sondern wo und wie AI im Vertrieb den grössten Hebel hat.</a:t>
-            </a:r>
-          </a:p>
-          <a:p>
-            <a:pPr algn="l">
-              <a:lnSpc>
-                <a:spcPts val="810"/>
-              </a:lnSpc>
-              <a:spcAft>
-                <a:spcPts val="200"/>
-              </a:spcAft>
-              <a:defRPr sz="600" b="0">
-                <a:solidFill>
-                  <a:srgbClr val="2A2A2A"/>
-                </a:solidFill>
-                <a:latin typeface="Space Grotesk"/>
-              </a:defRPr>
-            </a:pPr>
+              <a:t>Chatbot Tina). Gleichzeitig zeigt sich: die nächsten Schritte — von RM-Training über Produktwissen bis</a:t>
+            </a:r>
           </a:p>
           <a:p>
             <a:pPr algn="l">
@@ -5411,7 +5395,7 @@
               </a:defRPr>
             </a:pPr>
             <a:r>
-              <a:t>Wir schlagen vor, das gemeinsam zu erkunden — nicht mit einem fertigen Produktangebot, sondern</a:t>
+              <a:t>zur Kundenansprache — sind weniger klar. Welche Szenarien realistisch sind, was sich lohnt und was</a:t>
             </a:r>
           </a:p>
           <a:p>
@@ -5430,7 +5414,7 @@
               </a:defRPr>
             </a:pPr>
             <a:r>
-              <a:t>als Sparringspartner mit Produktionserfahrung. So haben wir auch mit Allianz Suisse begonnen.</a:t>
+              <a:t>nicht, lässt sich am besten gemeinsam herausfinden.</a:t>
             </a:r>
           </a:p>
         </p:txBody>
